--- a/1 Year 12 Weekly/Week 09 (09 Nov) 1.2.4 Paradigms, assembly, OOP/1 Lesson 1.2.4.pptx
+++ b/1 Year 12 Weekly/Week 09 (09 Nov) 1.2.4 Paradigms, assembly, OOP/1 Lesson 1.2.4.pptx
@@ -18,6 +18,23 @@
     <p:sldId id="266" r:id="rId17"/>
     <p:sldId id="267" r:id="rId18"/>
     <p:sldId id="268" r:id="rId19"/>
+    <p:sldId id="269" r:id="rId20"/>
+    <p:sldId id="270" r:id="rId21"/>
+    <p:sldId id="271" r:id="rId22"/>
+    <p:sldId id="272" r:id="rId23"/>
+    <p:sldId id="273" r:id="rId24"/>
+    <p:sldId id="274" r:id="rId25"/>
+    <p:sldId id="275" r:id="rId26"/>
+    <p:sldId id="276" r:id="rId27"/>
+    <p:sldId id="277" r:id="rId28"/>
+    <p:sldId id="278" r:id="rId29"/>
+    <p:sldId id="279" r:id="rId30"/>
+    <p:sldId id="280" r:id="rId31"/>
+    <p:sldId id="281" r:id="rId32"/>
+    <p:sldId id="282" r:id="rId33"/>
+    <p:sldId id="283" r:id="rId34"/>
+    <p:sldId id="284" r:id="rId35"/>
+    <p:sldId id="285" r:id="rId36"/>
   </p:sldIdLst>
   <p:sldSz cx="12191695" cy="6858000" type="screen4x3"/>
   <p:notesSz cx="6858000" cy="9144000"/>
@@ -3182,7 +3199,7 @@
                 </a:solidFill>
                 <a:latin typeface="Calibri"/>
               </a:rPr>
-              <a:t>Lesson deck — editable skeleton: adapt freely.</a:t>
+              <a:t>Week 09 (09 Nov)</a:t>
             </a:r>
           </a:p>
         </p:txBody>
@@ -3242,7 +3259,7 @@
                 </a:solidFill>
                 <a:latin typeface="Calibri"/>
               </a:rPr>
-              <a:t>Worked example</a:t>
+              <a:t>Writing an LMC program</a:t>
             </a:r>
           </a:p>
         </p:txBody>
@@ -3271,29 +3288,17 @@
           <a:p>
             <a:pPr/>
             <a:r>
-              <a:rPr sz="2200" b="1">
-                <a:solidFill>
-                  <a:srgbClr val="2B6CB0"/>
-                </a:solidFill>
-                <a:latin typeface="Calibri"/>
-              </a:rPr>
-              <a:t>Addressing-mode calculation for LDA 6</a:t>
-            </a:r>
-          </a:p>
-          <a:p>
-            <a:pPr lvl="1"/>
-            <a:r>
               <a:rPr sz="2000" b="0">
                 <a:solidFill>
                   <a:srgbClr val="222222"/>
                 </a:solidFill>
                 <a:latin typeface="Calibri"/>
               </a:rPr>
-              <a:t>1. Given: address 6 holds the value 9, address 9 holds the value 4, and the index register holds 2.</a:t>
-            </a:r>
-          </a:p>
-          <a:p>
-            <a:pPr lvl="1"/>
+              <a:t>Plan the data flow first: what enters the accumulator and when it must be saved.</a:t>
+            </a:r>
+          </a:p>
+          <a:p>
+            <a:pPr/>
             <a:r>
               <a:rPr sz="2000" b="0">
                 <a:solidFill>
@@ -3301,11 +3306,11 @@
                 </a:solidFill>
                 <a:latin typeface="Calibri"/>
               </a:rPr>
-              <a:t>2. Immediate: the operand IS the value, so the Accumulator is loaded with 6.</a:t>
-            </a:r>
-          </a:p>
-          <a:p>
-            <a:pPr lvl="1"/>
+              <a:t>The accumulator is overwritten by INP and LDA, so store values you need later with STA.</a:t>
+            </a:r>
+          </a:p>
+          <a:p>
+            <a:pPr/>
             <a:r>
               <a:rPr sz="2000" b="0">
                 <a:solidFill>
@@ -3313,11 +3318,11 @@
                 </a:solidFill>
                 <a:latin typeface="Calibri"/>
               </a:rPr>
-              <a:t>3. Direct: load the value held at address 6, which is 9.</a:t>
-            </a:r>
-          </a:p>
-          <a:p>
-            <a:pPr lvl="1"/>
+              <a:t>Labels name mailboxes so instructions can refer to data and branch targets.</a:t>
+            </a:r>
+          </a:p>
+          <a:p>
+            <a:pPr/>
             <a:r>
               <a:rPr sz="2000" b="0">
                 <a:solidFill>
@@ -3325,31 +3330,91 @@
                 </a:solidFill>
                 <a:latin typeface="Calibri"/>
               </a:rPr>
-              <a:t>4. Indirect: address 6 holds 9, so follow the pointer to address 9, whose value is 4.</a:t>
-            </a:r>
-          </a:p>
-          <a:p>
-            <a:pPr lvl="1"/>
-            <a:r>
-              <a:rPr sz="2000" b="0">
-                <a:solidFill>
-                  <a:srgbClr val="222222"/>
-                </a:solidFill>
-                <a:latin typeface="Calibri"/>
-              </a:rPr>
-              <a:t>5. Indexed: effective address = base 6 + index 2 = address 8, and the value is taken from address 8.</a:t>
-            </a:r>
-          </a:p>
-          <a:p>
-            <a:pPr lvl="1"/>
-            <a:r>
-              <a:rPr sz="2000" b="0">
-                <a:solidFill>
-                  <a:srgbClr val="222222"/>
-                </a:solidFill>
-                <a:latin typeface="Calibri"/>
-              </a:rPr>
-              <a:t>6. Key point: state which effective address each mode uses before reading its contents.</a:t>
+              <a:t>This program inputs two numbers and outputs their sum.</a:t>
+            </a:r>
+          </a:p>
+          <a:p>
+            <a:pPr lvl="1"/>
+            <a:r>
+              <a:rPr sz="1600" b="0">
+                <a:solidFill>
+                  <a:srgbClr val="1A365D"/>
+                </a:solidFill>
+                <a:latin typeface="Consolas"/>
+              </a:rPr>
+              <a:t>INP</a:t>
+            </a:r>
+          </a:p>
+          <a:p>
+            <a:pPr lvl="1"/>
+            <a:r>
+              <a:rPr sz="1600" b="0">
+                <a:solidFill>
+                  <a:srgbClr val="1A365D"/>
+                </a:solidFill>
+                <a:latin typeface="Consolas"/>
+              </a:rPr>
+              <a:t>STA FIRST</a:t>
+            </a:r>
+          </a:p>
+          <a:p>
+            <a:pPr lvl="1"/>
+            <a:r>
+              <a:rPr sz="1600" b="0">
+                <a:solidFill>
+                  <a:srgbClr val="1A365D"/>
+                </a:solidFill>
+                <a:latin typeface="Consolas"/>
+              </a:rPr>
+              <a:t>INP</a:t>
+            </a:r>
+          </a:p>
+          <a:p>
+            <a:pPr lvl="1"/>
+            <a:r>
+              <a:rPr sz="1600" b="0">
+                <a:solidFill>
+                  <a:srgbClr val="1A365D"/>
+                </a:solidFill>
+                <a:latin typeface="Consolas"/>
+              </a:rPr>
+              <a:t>ADD FIRST</a:t>
+            </a:r>
+          </a:p>
+          <a:p>
+            <a:pPr lvl="1"/>
+            <a:r>
+              <a:rPr sz="1600" b="0">
+                <a:solidFill>
+                  <a:srgbClr val="1A365D"/>
+                </a:solidFill>
+                <a:latin typeface="Consolas"/>
+              </a:rPr>
+              <a:t>OUT</a:t>
+            </a:r>
+          </a:p>
+          <a:p>
+            <a:pPr lvl="1"/>
+            <a:r>
+              <a:rPr sz="1600" b="0">
+                <a:solidFill>
+                  <a:srgbClr val="1A365D"/>
+                </a:solidFill>
+                <a:latin typeface="Consolas"/>
+              </a:rPr>
+              <a:t>HLT</a:t>
+            </a:r>
+          </a:p>
+          <a:p>
+            <a:pPr lvl="1"/>
+            <a:r>
+              <a:rPr sz="1600" b="0">
+                <a:solidFill>
+                  <a:srgbClr val="1A365D"/>
+                </a:solidFill>
+                <a:latin typeface="Consolas"/>
+              </a:rPr>
+              <a:t>FIRST DAT</a:t>
             </a:r>
           </a:p>
         </p:txBody>
@@ -3409,7 +3474,7 @@
                 </a:solidFill>
                 <a:latin typeface="Calibri"/>
               </a:rPr>
-              <a:t>Your turn</a:t>
+              <a:t>Tracing LMC with branches</a:t>
             </a:r>
           </a:p>
         </p:txBody>
@@ -3438,48 +3503,121 @@
           <a:p>
             <a:pPr/>
             <a:r>
-              <a:rPr sz="2400" b="1">
-                <a:solidFill>
-                  <a:srgbClr val="2B6CB0"/>
-                </a:solidFill>
-                <a:latin typeface="Calibri"/>
-              </a:rPr>
-              <a:t>Task</a:t>
-            </a:r>
-          </a:p>
-          <a:p>
-            <a:pPr lvl="1"/>
-            <a:r>
-              <a:rPr sz="2200" b="0">
-                <a:solidFill>
-                  <a:srgbClr val="222222"/>
-                </a:solidFill>
-                <a:latin typeface="Calibri"/>
-              </a:rPr>
-              <a:t>Given address 4 holds 7, address 7 holds 1 and the index register holds 3, state the value loaded by LDA 4 for immediate, direct and indirect modes, and give the effective address for indexed mode.</a:t>
-            </a:r>
-          </a:p>
-          <a:p>
-            <a:r>
-              <a:rPr sz="2400" b="1">
-                <a:solidFill>
-                  <a:srgbClr val="B76E00"/>
-                </a:solidFill>
-                <a:latin typeface="Calibri"/>
-              </a:rPr>
-              <a:t>Challenge / stretch</a:t>
-            </a:r>
-          </a:p>
-          <a:p>
-            <a:pPr lvl="1"/>
-            <a:r>
-              <a:rPr sz="2200" b="0">
-                <a:solidFill>
-                  <a:srgbClr val="222222"/>
-                </a:solidFill>
-                <a:latin typeface="Calibri"/>
-              </a:rPr>
-              <a:t>A program models Car, Bus and Motorbike, which share speed and a move() method but display themselves differently. Explain how a Vehicle superclass, inheritance and overriding a display() method (polymorphism) would be used, and give one maintenance benefit of this design.</a:t>
+              <a:rPr sz="2000" b="0">
+                <a:solidFill>
+                  <a:srgbClr val="222222"/>
+                </a:solidFill>
+                <a:latin typeface="Calibri"/>
+              </a:rPr>
+              <a:t>Trace instruction by instruction, recording the accumulator and any changed mailbox.</a:t>
+            </a:r>
+          </a:p>
+          <a:p>
+            <a:pPr/>
+            <a:r>
+              <a:rPr sz="2000" b="0">
+                <a:solidFill>
+                  <a:srgbClr val="222222"/>
+                </a:solidFill>
+                <a:latin typeface="Calibri"/>
+              </a:rPr>
+              <a:t>At each branch, evaluate the condition on the current accumulator before moving the program counter.</a:t>
+            </a:r>
+          </a:p>
+          <a:p>
+            <a:pPr/>
+            <a:r>
+              <a:rPr sz="2000" b="0">
+                <a:solidFill>
+                  <a:srgbClr val="222222"/>
+                </a:solidFill>
+                <a:latin typeface="Calibri"/>
+              </a:rPr>
+              <a:t>BRP is taken when the accumulator is zero or positive, so zero still loops.</a:t>
+            </a:r>
+          </a:p>
+          <a:p>
+            <a:pPr/>
+            <a:r>
+              <a:rPr sz="2000" b="0">
+                <a:solidFill>
+                  <a:srgbClr val="222222"/>
+                </a:solidFill>
+                <a:latin typeface="Calibri"/>
+              </a:rPr>
+              <a:t>This countdown outputs its input, then each value down to zero.</a:t>
+            </a:r>
+          </a:p>
+          <a:p>
+            <a:pPr lvl="1"/>
+            <a:r>
+              <a:rPr sz="1600" b="0">
+                <a:solidFill>
+                  <a:srgbClr val="1A365D"/>
+                </a:solidFill>
+                <a:latin typeface="Consolas"/>
+              </a:rPr>
+              <a:t>      INP</a:t>
+            </a:r>
+          </a:p>
+          <a:p>
+            <a:pPr lvl="1"/>
+            <a:r>
+              <a:rPr sz="1600" b="0">
+                <a:solidFill>
+                  <a:srgbClr val="1A365D"/>
+                </a:solidFill>
+                <a:latin typeface="Consolas"/>
+              </a:rPr>
+              <a:t>LOOP  OUT</a:t>
+            </a:r>
+          </a:p>
+          <a:p>
+            <a:pPr lvl="1"/>
+            <a:r>
+              <a:rPr sz="1600" b="0">
+                <a:solidFill>
+                  <a:srgbClr val="1A365D"/>
+                </a:solidFill>
+                <a:latin typeface="Consolas"/>
+              </a:rPr>
+              <a:t>      SUB ONE</a:t>
+            </a:r>
+          </a:p>
+          <a:p>
+            <a:pPr lvl="1"/>
+            <a:r>
+              <a:rPr sz="1600" b="0">
+                <a:solidFill>
+                  <a:srgbClr val="1A365D"/>
+                </a:solidFill>
+                <a:latin typeface="Consolas"/>
+              </a:rPr>
+              <a:t>      BRP LOOP</a:t>
+            </a:r>
+          </a:p>
+          <a:p>
+            <a:pPr lvl="1"/>
+            <a:r>
+              <a:rPr sz="1600" b="0">
+                <a:solidFill>
+                  <a:srgbClr val="1A365D"/>
+                </a:solidFill>
+                <a:latin typeface="Consolas"/>
+              </a:rPr>
+              <a:t>      HLT</a:t>
+            </a:r>
+          </a:p>
+          <a:p>
+            <a:pPr lvl="1"/>
+            <a:r>
+              <a:rPr sz="1600" b="0">
+                <a:solidFill>
+                  <a:srgbClr val="1A365D"/>
+                </a:solidFill>
+                <a:latin typeface="Consolas"/>
+              </a:rPr>
+              <a:t>ONE   DAT 1</a:t>
             </a:r>
           </a:p>
         </p:txBody>
@@ -3539,7 +3677,7 @@
                 </a:solidFill>
                 <a:latin typeface="Calibri"/>
               </a:rPr>
-              <a:t>Exit ticket</a:t>
+              <a:t>Addressing modes: immediate and direct</a:t>
             </a:r>
           </a:p>
         </p:txBody>
@@ -3566,36 +3704,51 @@
           </a:bodyPr>
           <a:lstStyle/>
           <a:p>
-            <a:r>
-              <a:rPr sz="2200" b="1">
-                <a:solidFill>
-                  <a:srgbClr val="222222"/>
-                </a:solidFill>
-                <a:latin typeface="Calibri"/>
-              </a:rPr>
-              <a:t>1. Define class, object and method.</a:t>
-            </a:r>
-          </a:p>
-          <a:p>
-            <a:r>
-              <a:rPr sz="2200" b="1">
-                <a:solidFill>
-                  <a:srgbClr val="222222"/>
-                </a:solidFill>
-                <a:latin typeface="Calibri"/>
-              </a:rPr>
-              <a:t>2. For LDA 6 where address 6 holds 9 and address 9 holds 4, what is loaded in direct and in indirect mode?</a:t>
-            </a:r>
-          </a:p>
-          <a:p>
-            <a:r>
-              <a:rPr sz="2200" b="1">
-                <a:solidFill>
-                  <a:srgbClr val="222222"/>
-                </a:solidFill>
-                <a:latin typeface="Calibri"/>
-              </a:rPr>
-              <a:t>3. What is encapsulation and one benefit it provides?</a:t>
+            <a:pPr/>
+            <a:r>
+              <a:rPr sz="2000" b="0">
+                <a:solidFill>
+                  <a:srgbClr val="222222"/>
+                </a:solidFill>
+                <a:latin typeface="Calibri"/>
+              </a:rPr>
+              <a:t>The addressing mode determines how the operand is interpreted.</a:t>
+            </a:r>
+          </a:p>
+          <a:p>
+            <a:pPr/>
+            <a:r>
+              <a:rPr sz="2000" b="0">
+                <a:solidFill>
+                  <a:srgbClr val="222222"/>
+                </a:solidFill>
+                <a:latin typeface="Calibri"/>
+              </a:rPr>
+              <a:t>Immediate: the operand is the value itself, no memory access needed.</a:t>
+            </a:r>
+          </a:p>
+          <a:p>
+            <a:pPr/>
+            <a:r>
+              <a:rPr sz="2000" b="0">
+                <a:solidFill>
+                  <a:srgbClr val="222222"/>
+                </a:solidFill>
+                <a:latin typeface="Calibri"/>
+              </a:rPr>
+              <a:t>Direct: the operand is the address of the mailbox holding the value, one lookup.</a:t>
+            </a:r>
+          </a:p>
+          <a:p>
+            <a:pPr/>
+            <a:r>
+              <a:rPr sz="2000" b="0">
+                <a:solidFill>
+                  <a:srgbClr val="222222"/>
+                </a:solidFill>
+                <a:latin typeface="Calibri"/>
+              </a:rPr>
+              <a:t>Standard LMC instructions such as ADD 6 use direct addressing.</a:t>
             </a:r>
           </a:p>
         </p:txBody>
@@ -3655,7 +3808,7 @@
                 </a:solidFill>
                 <a:latin typeface="Calibri"/>
               </a:rPr>
-              <a:t>Exit ticket — answers</a:t>
+              <a:t>Addressing modes: indirect and indexed</a:t>
             </a:r>
           </a:p>
         </p:txBody>
@@ -3682,72 +3835,1233 @@
           </a:bodyPr>
           <a:lstStyle/>
           <a:p>
+            <a:pPr/>
+            <a:r>
+              <a:rPr sz="2000" b="0">
+                <a:solidFill>
+                  <a:srgbClr val="222222"/>
+                </a:solidFill>
+                <a:latin typeface="Calibri"/>
+              </a:rPr>
+              <a:t>Indirect: the operand is the address of a location holding the address of the value, two lookups.</a:t>
+            </a:r>
+          </a:p>
+          <a:p>
+            <a:pPr/>
+            <a:r>
+              <a:rPr sz="2000" b="0">
+                <a:solidFill>
+                  <a:srgbClr val="222222"/>
+                </a:solidFill>
+                <a:latin typeface="Calibri"/>
+              </a:rPr>
+              <a:t>Indirect addressing implements pointers.</a:t>
+            </a:r>
+          </a:p>
+          <a:p>
+            <a:pPr/>
+            <a:r>
+              <a:rPr sz="2000" b="0">
+                <a:solidFill>
+                  <a:srgbClr val="222222"/>
+                </a:solidFill>
+                <a:latin typeface="Calibri"/>
+              </a:rPr>
+              <a:t>Indexed: effective address equals the operand plus the index register contents.</a:t>
+            </a:r>
+          </a:p>
+          <a:p>
+            <a:pPr/>
+            <a:r>
+              <a:rPr sz="2000" b="0">
+                <a:solidFill>
+                  <a:srgbClr val="222222"/>
+                </a:solidFill>
+                <a:latin typeface="Calibri"/>
+              </a:rPr>
+              <a:t>Incrementing the index register steps through an array one element at a time.</a:t>
+            </a:r>
+          </a:p>
+          <a:p>
+            <a:pPr/>
+            <a:r>
+              <a:rPr sz="1800" b="1">
+                <a:solidFill>
+                  <a:srgbClr val="B76E00"/>
+                </a:solidFill>
+                <a:latin typeface="Calibri"/>
+              </a:rPr>
+              <a:t>Show the working in answers: immediate no lookup, direct one, indirect two, indexed base plus index.</a:t>
+            </a:r>
+          </a:p>
+        </p:txBody>
+      </p:sp>
+    </p:spTree>
+  </p:cSld>
+  <p:clrMapOvr>
+    <a:masterClrMapping/>
+  </p:clrMapOvr>
+</p:sld>
+</file>
+
+<file path=ppt/slides/slide14.xml><?xml version="1.0" encoding="utf-8"?>
+<p:sld xmlns:a="http://schemas.openxmlformats.org/drawingml/2006/main" xmlns:p="http://schemas.openxmlformats.org/presentationml/2006/main" xmlns:r="http://schemas.openxmlformats.org/officeDocument/2006/relationships">
+  <p:cSld>
+    <p:bg>
+      <p:bgPr>
+        <a:solidFill>
+          <a:srgbClr val="FFFFFF"/>
+        </a:solidFill>
+        <a:effectLst/>
+      </p:bgPr>
+    </p:bg>
+    <p:spTree>
+      <p:nvGrpSpPr>
+        <p:cNvPr id="1" name=""/>
+        <p:cNvGrpSpPr/>
+        <p:nvPr/>
+      </p:nvGrpSpPr>
+      <p:grpSpPr/>
+      <p:sp>
+        <p:nvSpPr>
+          <p:cNvPr id="2" name="TextBox 1"/>
+          <p:cNvSpPr txBox="1"/>
+          <p:nvPr/>
+        </p:nvSpPr>
+        <p:spPr>
+          <a:xfrm>
+            <a:off x="548640" y="274320"/>
+            <a:ext cx="11064240" cy="822960"/>
+          </a:xfrm>
+          <a:prstGeom prst="rect">
+            <a:avLst/>
+          </a:prstGeom>
+          <a:noFill/>
+        </p:spPr>
+        <p:txBody>
+          <a:bodyPr wrap="square">
+            <a:spAutoFit/>
+          </a:bodyPr>
+          <a:lstStyle/>
+          <a:p>
+            <a:r>
+              <a:rPr sz="3000" b="1" i="0">
+                <a:solidFill>
+                  <a:srgbClr val="2B6CB0"/>
+                </a:solidFill>
+                <a:latin typeface="Calibri"/>
+              </a:rPr>
+              <a:t>OOP: classes, objects, attributes, methods</a:t>
+            </a:r>
+          </a:p>
+        </p:txBody>
+      </p:sp>
+      <p:sp>
+        <p:nvSpPr>
+          <p:cNvPr id="3" name="TextBox 2"/>
+          <p:cNvSpPr txBox="1"/>
+          <p:nvPr/>
+        </p:nvSpPr>
+        <p:spPr>
+          <a:xfrm>
+            <a:off x="640080" y="1280160"/>
+            <a:ext cx="10881360" cy="5120640"/>
+          </a:xfrm>
+          <a:prstGeom prst="rect">
+            <a:avLst/>
+          </a:prstGeom>
+          <a:noFill/>
+        </p:spPr>
+        <p:txBody>
+          <a:bodyPr wrap="square">
+            <a:spAutoFit/>
+          </a:bodyPr>
+          <a:lstStyle/>
+          <a:p>
+            <a:pPr/>
+            <a:r>
+              <a:rPr sz="2000" b="0">
+                <a:solidFill>
+                  <a:srgbClr val="222222"/>
+                </a:solidFill>
+                <a:latin typeface="Calibri"/>
+              </a:rPr>
+              <a:t>A class is a template or blueprint; an object is an instance created from it by instantiation.</a:t>
+            </a:r>
+          </a:p>
+          <a:p>
+            <a:pPr/>
+            <a:r>
+              <a:rPr sz="2000" b="0">
+                <a:solidFill>
+                  <a:srgbClr val="222222"/>
+                </a:solidFill>
+                <a:latin typeface="Calibri"/>
+              </a:rPr>
+              <a:t>An attribute is a variable of the class, holding the object's state.</a:t>
+            </a:r>
+          </a:p>
+          <a:p>
+            <a:pPr/>
+            <a:r>
+              <a:rPr sz="2000" b="0">
+                <a:solidFill>
+                  <a:srgbClr val="222222"/>
+                </a:solidFill>
+                <a:latin typeface="Calibri"/>
+              </a:rPr>
+              <a:t>A method is a subroutine of the class, defining its behaviour.</a:t>
+            </a:r>
+          </a:p>
+          <a:p>
+            <a:pPr/>
+            <a:r>
+              <a:rPr sz="2000" b="0">
+                <a:solidFill>
+                  <a:srgbClr val="222222"/>
+                </a:solidFill>
+                <a:latin typeface="Calibri"/>
+              </a:rPr>
+              <a:t>The constructor, new, sets up an object's attributes when it is created.</a:t>
+            </a:r>
+          </a:p>
+          <a:p>
+            <a:pPr lvl="1"/>
+            <a:r>
+              <a:rPr sz="1600" b="0">
+                <a:solidFill>
+                  <a:srgbClr val="1A365D"/>
+                </a:solidFill>
+                <a:latin typeface="Consolas"/>
+              </a:rPr>
+              <a:t>class Vehicle</a:t>
+            </a:r>
+          </a:p>
+          <a:p>
+            <a:pPr lvl="1"/>
+            <a:r>
+              <a:rPr sz="1600" b="0">
+                <a:solidFill>
+                  <a:srgbClr val="1A365D"/>
+                </a:solidFill>
+                <a:latin typeface="Consolas"/>
+              </a:rPr>
+              <a:t>   private speed</a:t>
+            </a:r>
+          </a:p>
+          <a:p>
+            <a:pPr lvl="1"/>
+            <a:r>
+              <a:rPr sz="1600" b="0">
+                <a:solidFill>
+                  <a:srgbClr val="1A365D"/>
+                </a:solidFill>
+                <a:latin typeface="Consolas"/>
+              </a:rPr>
+              <a:t>   public procedure new(givenSpeed)</a:t>
+            </a:r>
+          </a:p>
+          <a:p>
+            <a:pPr lvl="1"/>
+            <a:r>
+              <a:rPr sz="1600" b="0">
+                <a:solidFill>
+                  <a:srgbClr val="1A365D"/>
+                </a:solidFill>
+                <a:latin typeface="Consolas"/>
+              </a:rPr>
+              <a:t>      speed = givenSpeed</a:t>
+            </a:r>
+          </a:p>
+          <a:p>
+            <a:pPr lvl="1"/>
+            <a:r>
+              <a:rPr sz="1600" b="0">
+                <a:solidFill>
+                  <a:srgbClr val="1A365D"/>
+                </a:solidFill>
+                <a:latin typeface="Consolas"/>
+              </a:rPr>
+              <a:t>   endprocedure</a:t>
+            </a:r>
+          </a:p>
+          <a:p>
+            <a:pPr lvl="1"/>
+            <a:r>
+              <a:rPr sz="1600" b="0">
+                <a:solidFill>
+                  <a:srgbClr val="1A365D"/>
+                </a:solidFill>
+                <a:latin typeface="Consolas"/>
+              </a:rPr>
+              <a:t>   public function getSpeed()</a:t>
+            </a:r>
+          </a:p>
+          <a:p>
+            <a:pPr lvl="1"/>
+            <a:r>
+              <a:rPr sz="1600" b="0">
+                <a:solidFill>
+                  <a:srgbClr val="1A365D"/>
+                </a:solidFill>
+                <a:latin typeface="Consolas"/>
+              </a:rPr>
+              <a:t>      return speed</a:t>
+            </a:r>
+          </a:p>
+          <a:p>
+            <a:pPr lvl="1"/>
+            <a:r>
+              <a:rPr sz="1600" b="0">
+                <a:solidFill>
+                  <a:srgbClr val="1A365D"/>
+                </a:solidFill>
+                <a:latin typeface="Consolas"/>
+              </a:rPr>
+              <a:t>   endfunction</a:t>
+            </a:r>
+          </a:p>
+          <a:p>
+            <a:pPr lvl="1"/>
+            <a:r>
+              <a:rPr sz="1600" b="0">
+                <a:solidFill>
+                  <a:srgbClr val="1A365D"/>
+                </a:solidFill>
+                <a:latin typeface="Consolas"/>
+              </a:rPr>
+              <a:t>endclass</a:t>
+            </a:r>
+          </a:p>
+          <a:p>
+            <a:pPr lvl="1"/>
+            <a:r>
+              <a:rPr sz="1600" b="0">
+                <a:solidFill>
+                  <a:srgbClr val="1A365D"/>
+                </a:solidFill>
+                <a:latin typeface="Consolas"/>
+              </a:rPr>
+              <a:t>myCar = new Vehicle(30)</a:t>
+            </a:r>
+          </a:p>
+        </p:txBody>
+      </p:sp>
+    </p:spTree>
+  </p:cSld>
+  <p:clrMapOvr>
+    <a:masterClrMapping/>
+  </p:clrMapOvr>
+</p:sld>
+</file>
+
+<file path=ppt/slides/slide15.xml><?xml version="1.0" encoding="utf-8"?>
+<p:sld xmlns:a="http://schemas.openxmlformats.org/drawingml/2006/main" xmlns:p="http://schemas.openxmlformats.org/presentationml/2006/main" xmlns:r="http://schemas.openxmlformats.org/officeDocument/2006/relationships">
+  <p:cSld>
+    <p:bg>
+      <p:bgPr>
+        <a:solidFill>
+          <a:srgbClr val="FFFFFF"/>
+        </a:solidFill>
+        <a:effectLst/>
+      </p:bgPr>
+    </p:bg>
+    <p:spTree>
+      <p:nvGrpSpPr>
+        <p:cNvPr id="1" name=""/>
+        <p:cNvGrpSpPr/>
+        <p:nvPr/>
+      </p:nvGrpSpPr>
+      <p:grpSpPr/>
+      <p:sp>
+        <p:nvSpPr>
+          <p:cNvPr id="2" name="TextBox 1"/>
+          <p:cNvSpPr txBox="1"/>
+          <p:nvPr/>
+        </p:nvSpPr>
+        <p:spPr>
+          <a:xfrm>
+            <a:off x="548640" y="274320"/>
+            <a:ext cx="11064240" cy="822960"/>
+          </a:xfrm>
+          <a:prstGeom prst="rect">
+            <a:avLst/>
+          </a:prstGeom>
+          <a:noFill/>
+        </p:spPr>
+        <p:txBody>
+          <a:bodyPr wrap="square">
+            <a:spAutoFit/>
+          </a:bodyPr>
+          <a:lstStyle/>
+          <a:p>
+            <a:r>
+              <a:rPr sz="3000" b="1" i="0">
+                <a:solidFill>
+                  <a:srgbClr val="2B6CB0"/>
+                </a:solidFill>
+                <a:latin typeface="Calibri"/>
+              </a:rPr>
+              <a:t>Encapsulation, inheritance and polymorphism</a:t>
+            </a:r>
+          </a:p>
+        </p:txBody>
+      </p:sp>
+      <p:sp>
+        <p:nvSpPr>
+          <p:cNvPr id="3" name="TextBox 2"/>
+          <p:cNvSpPr txBox="1"/>
+          <p:nvPr/>
+        </p:nvSpPr>
+        <p:spPr>
+          <a:xfrm>
+            <a:off x="640080" y="1280160"/>
+            <a:ext cx="10881360" cy="5120640"/>
+          </a:xfrm>
+          <a:prstGeom prst="rect">
+            <a:avLst/>
+          </a:prstGeom>
+          <a:noFill/>
+        </p:spPr>
+        <p:txBody>
+          <a:bodyPr wrap="square">
+            <a:spAutoFit/>
+          </a:bodyPr>
+          <a:lstStyle/>
+          <a:p>
+            <a:pPr/>
+            <a:r>
+              <a:rPr sz="2000" b="0">
+                <a:solidFill>
+                  <a:srgbClr val="222222"/>
+                </a:solidFill>
+                <a:latin typeface="Calibri"/>
+              </a:rPr>
+              <a:t>Encapsulation makes attributes private, accessed only through public methods, protecting the object's data.</a:t>
+            </a:r>
+          </a:p>
+          <a:p>
+            <a:pPr/>
+            <a:r>
+              <a:rPr sz="2000" b="0">
+                <a:solidFill>
+                  <a:srgbClr val="222222"/>
+                </a:solidFill>
+                <a:latin typeface="Calibri"/>
+              </a:rPr>
+              <a:t>Inheritance: a subclass acquires the superclass's attributes and methods, then adds or overrides.</a:t>
+            </a:r>
+          </a:p>
+          <a:p>
+            <a:pPr/>
+            <a:r>
+              <a:rPr sz="2000" b="0">
+                <a:solidFill>
+                  <a:srgbClr val="222222"/>
+                </a:solidFill>
+                <a:latin typeface="Calibri"/>
+              </a:rPr>
+              <a:t>Inheritance removes duplicated code shared by related classes.</a:t>
+            </a:r>
+          </a:p>
+          <a:p>
+            <a:pPr/>
+            <a:r>
+              <a:rPr sz="2000" b="0">
+                <a:solidFill>
+                  <a:srgbClr val="222222"/>
+                </a:solidFill>
+                <a:latin typeface="Calibri"/>
+              </a:rPr>
+              <a:t>Polymorphism: the same method call behaves differently per object, usually via overriding.</a:t>
+            </a:r>
+          </a:p>
+          <a:p>
+            <a:pPr/>
+            <a:r>
+              <a:rPr sz="2000" b="0">
+                <a:solidFill>
+                  <a:srgbClr val="222222"/>
+                </a:solidFill>
+                <a:latin typeface="Calibri"/>
+              </a:rPr>
+              <a:t>Class diagrams: name, attributes, methods; minus means private, plus public; the arrow points child to parent.</a:t>
+            </a:r>
+          </a:p>
+          <a:p>
+            <a:pPr lvl="1"/>
+            <a:r>
+              <a:rPr sz="1600" b="0">
+                <a:solidFill>
+                  <a:srgbClr val="1A365D"/>
+                </a:solidFill>
+                <a:latin typeface="Consolas"/>
+              </a:rPr>
+              <a:t>class ElectricCar inherits Vehicle</a:t>
+            </a:r>
+          </a:p>
+          <a:p>
+            <a:pPr lvl="1"/>
+            <a:r>
+              <a:rPr sz="1600" b="0">
+                <a:solidFill>
+                  <a:srgbClr val="1A365D"/>
+                </a:solidFill>
+                <a:latin typeface="Consolas"/>
+              </a:rPr>
+              <a:t>   private charge</a:t>
+            </a:r>
+          </a:p>
+          <a:p>
+            <a:pPr lvl="1"/>
+            <a:r>
+              <a:rPr sz="1600" b="0">
+                <a:solidFill>
+                  <a:srgbClr val="1A365D"/>
+                </a:solidFill>
+                <a:latin typeface="Consolas"/>
+              </a:rPr>
+              <a:t>   public procedure accelerate()</a:t>
+            </a:r>
+          </a:p>
+          <a:p>
+            <a:pPr lvl="1"/>
+            <a:r>
+              <a:rPr sz="1600" b="0">
+                <a:solidFill>
+                  <a:srgbClr val="1A365D"/>
+                </a:solidFill>
+                <a:latin typeface="Consolas"/>
+              </a:rPr>
+              <a:t>      charge = charge - 1</a:t>
+            </a:r>
+          </a:p>
+          <a:p>
+            <a:pPr lvl="1"/>
+            <a:r>
+              <a:rPr sz="1600" b="0">
+                <a:solidFill>
+                  <a:srgbClr val="1A365D"/>
+                </a:solidFill>
+                <a:latin typeface="Consolas"/>
+              </a:rPr>
+              <a:t>      super.accelerate()</a:t>
+            </a:r>
+          </a:p>
+          <a:p>
+            <a:pPr lvl="1"/>
+            <a:r>
+              <a:rPr sz="1600" b="0">
+                <a:solidFill>
+                  <a:srgbClr val="1A365D"/>
+                </a:solidFill>
+                <a:latin typeface="Consolas"/>
+              </a:rPr>
+              <a:t>   endprocedure</a:t>
+            </a:r>
+          </a:p>
+          <a:p>
+            <a:pPr lvl="1"/>
+            <a:r>
+              <a:rPr sz="1600" b="0">
+                <a:solidFill>
+                  <a:srgbClr val="1A365D"/>
+                </a:solidFill>
+                <a:latin typeface="Consolas"/>
+              </a:rPr>
+              <a:t>endclass</a:t>
+            </a:r>
+          </a:p>
+        </p:txBody>
+      </p:sp>
+    </p:spTree>
+  </p:cSld>
+  <p:clrMapOvr>
+    <a:masterClrMapping/>
+  </p:clrMapOvr>
+</p:sld>
+</file>
+
+<file path=ppt/slides/slide16.xml><?xml version="1.0" encoding="utf-8"?>
+<p:sld xmlns:a="http://schemas.openxmlformats.org/drawingml/2006/main" xmlns:p="http://schemas.openxmlformats.org/presentationml/2006/main" xmlns:r="http://schemas.openxmlformats.org/officeDocument/2006/relationships">
+  <p:cSld>
+    <p:bg>
+      <p:bgPr>
+        <a:solidFill>
+          <a:srgbClr val="FFFFFF"/>
+        </a:solidFill>
+        <a:effectLst/>
+      </p:bgPr>
+    </p:bg>
+    <p:spTree>
+      <p:nvGrpSpPr>
+        <p:cNvPr id="1" name=""/>
+        <p:cNvGrpSpPr/>
+        <p:nvPr/>
+      </p:nvGrpSpPr>
+      <p:grpSpPr/>
+      <p:sp>
+        <p:nvSpPr>
+          <p:cNvPr id="2" name="TextBox 1"/>
+          <p:cNvSpPr txBox="1"/>
+          <p:nvPr/>
+        </p:nvSpPr>
+        <p:spPr>
+          <a:xfrm>
+            <a:off x="548640" y="274320"/>
+            <a:ext cx="11064240" cy="822960"/>
+          </a:xfrm>
+          <a:prstGeom prst="rect">
+            <a:avLst/>
+          </a:prstGeom>
+          <a:noFill/>
+        </p:spPr>
+        <p:txBody>
+          <a:bodyPr wrap="square">
+            <a:spAutoFit/>
+          </a:bodyPr>
+          <a:lstStyle/>
+          <a:p>
+            <a:r>
+              <a:rPr sz="3000" b="1" i="0">
+                <a:solidFill>
+                  <a:srgbClr val="2B6CB0"/>
+                </a:solidFill>
+                <a:latin typeface="Calibri"/>
+              </a:rPr>
+              <a:t>Worked example 1</a:t>
+            </a:r>
+          </a:p>
+        </p:txBody>
+      </p:sp>
+      <p:sp>
+        <p:nvSpPr>
+          <p:cNvPr id="3" name="TextBox 2"/>
+          <p:cNvSpPr txBox="1"/>
+          <p:nvPr/>
+        </p:nvSpPr>
+        <p:spPr>
+          <a:xfrm>
+            <a:off x="640080" y="1280160"/>
+            <a:ext cx="10881360" cy="5120640"/>
+          </a:xfrm>
+          <a:prstGeom prst="rect">
+            <a:avLst/>
+          </a:prstGeom>
+          <a:noFill/>
+        </p:spPr>
+        <p:txBody>
+          <a:bodyPr wrap="square">
+            <a:spAutoFit/>
+          </a:bodyPr>
+          <a:lstStyle/>
+          <a:p>
+            <a:pPr/>
             <a:r>
               <a:rPr sz="2200" b="1">
                 <a:solidFill>
-                  <a:srgbClr val="222222"/>
-                </a:solidFill>
-                <a:latin typeface="Calibri"/>
-              </a:rPr>
-              <a:t>1. Define class, object and method.</a:t>
-            </a:r>
-          </a:p>
-          <a:p>
-            <a:pPr lvl="1"/>
-            <a:r>
-              <a:rPr sz="1800" i="1">
+                  <a:srgbClr val="2B6CB0"/>
+                </a:solidFill>
+                <a:latin typeface="Calibri"/>
+              </a:rPr>
+              <a:t>Tracing an LMC sum program with inputs 5 and 7</a:t>
+            </a:r>
+          </a:p>
+          <a:p>
+            <a:pPr lvl="1"/>
+            <a:r>
+              <a:rPr sz="1900" b="0">
+                <a:solidFill>
+                  <a:srgbClr val="222222"/>
+                </a:solidFill>
+                <a:latin typeface="Calibri"/>
+              </a:rPr>
+              <a:t>1. Program: INP, STA FIRST, INP, ADD FIRST, OUT, HLT, FIRST DAT.</a:t>
+            </a:r>
+          </a:p>
+          <a:p>
+            <a:pPr lvl="1"/>
+            <a:r>
+              <a:rPr sz="1900" b="0">
+                <a:solidFill>
+                  <a:srgbClr val="222222"/>
+                </a:solidFill>
+                <a:latin typeface="Calibri"/>
+              </a:rPr>
+              <a:t>2. INP: the accumulator becomes 5, the first input.</a:t>
+            </a:r>
+          </a:p>
+          <a:p>
+            <a:pPr lvl="1"/>
+            <a:r>
+              <a:rPr sz="1900" b="0">
+                <a:solidFill>
+                  <a:srgbClr val="222222"/>
+                </a:solidFill>
+                <a:latin typeface="Calibri"/>
+              </a:rPr>
+              <a:t>3. STA FIRST: mailbox FIRST now holds 5; the accumulator still holds 5.</a:t>
+            </a:r>
+          </a:p>
+          <a:p>
+            <a:pPr lvl="1"/>
+            <a:r>
+              <a:rPr sz="1900" b="0">
+                <a:solidFill>
+                  <a:srgbClr val="222222"/>
+                </a:solidFill>
+                <a:latin typeface="Calibri"/>
+              </a:rPr>
+              <a:t>4. INP: the accumulator is overwritten with 7, the second input.</a:t>
+            </a:r>
+          </a:p>
+          <a:p>
+            <a:pPr lvl="1"/>
+            <a:r>
+              <a:rPr sz="1900" b="0">
+                <a:solidFill>
+                  <a:srgbClr val="222222"/>
+                </a:solidFill>
+                <a:latin typeface="Calibri"/>
+              </a:rPr>
+              <a:t>5. ADD FIRST: the accumulator becomes 7 + 5 = 12.</a:t>
+            </a:r>
+          </a:p>
+          <a:p>
+            <a:pPr lvl="1"/>
+            <a:r>
+              <a:rPr sz="1900" b="0">
+                <a:solidFill>
+                  <a:srgbClr val="222222"/>
+                </a:solidFill>
+                <a:latin typeface="Calibri"/>
+              </a:rPr>
+              <a:t>6. OUT: 12 is output.</a:t>
+            </a:r>
+          </a:p>
+          <a:p>
+            <a:pPr lvl="1"/>
+            <a:r>
+              <a:rPr sz="1900" b="0">
+                <a:solidFill>
+                  <a:srgbClr val="222222"/>
+                </a:solidFill>
+                <a:latin typeface="Calibri"/>
+              </a:rPr>
+              <a:t>7. HLT: the program stops; final state FIRST = 5, accumulator = 12, output 12.</a:t>
+            </a:r>
+          </a:p>
+        </p:txBody>
+      </p:sp>
+    </p:spTree>
+  </p:cSld>
+  <p:clrMapOvr>
+    <a:masterClrMapping/>
+  </p:clrMapOvr>
+</p:sld>
+</file>
+
+<file path=ppt/slides/slide17.xml><?xml version="1.0" encoding="utf-8"?>
+<p:sld xmlns:a="http://schemas.openxmlformats.org/drawingml/2006/main" xmlns:p="http://schemas.openxmlformats.org/presentationml/2006/main" xmlns:r="http://schemas.openxmlformats.org/officeDocument/2006/relationships">
+  <p:cSld>
+    <p:bg>
+      <p:bgPr>
+        <a:solidFill>
+          <a:srgbClr val="FFFFFF"/>
+        </a:solidFill>
+        <a:effectLst/>
+      </p:bgPr>
+    </p:bg>
+    <p:spTree>
+      <p:nvGrpSpPr>
+        <p:cNvPr id="1" name=""/>
+        <p:cNvGrpSpPr/>
+        <p:nvPr/>
+      </p:nvGrpSpPr>
+      <p:grpSpPr/>
+      <p:sp>
+        <p:nvSpPr>
+          <p:cNvPr id="2" name="TextBox 1"/>
+          <p:cNvSpPr txBox="1"/>
+          <p:nvPr/>
+        </p:nvSpPr>
+        <p:spPr>
+          <a:xfrm>
+            <a:off x="548640" y="274320"/>
+            <a:ext cx="11064240" cy="822960"/>
+          </a:xfrm>
+          <a:prstGeom prst="rect">
+            <a:avLst/>
+          </a:prstGeom>
+          <a:noFill/>
+        </p:spPr>
+        <p:txBody>
+          <a:bodyPr wrap="square">
+            <a:spAutoFit/>
+          </a:bodyPr>
+          <a:lstStyle/>
+          <a:p>
+            <a:r>
+              <a:rPr sz="3000" b="1" i="0">
+                <a:solidFill>
+                  <a:srgbClr val="2B6CB0"/>
+                </a:solidFill>
+                <a:latin typeface="Calibri"/>
+              </a:rPr>
+              <a:t>Worked example 2</a:t>
+            </a:r>
+          </a:p>
+        </p:txBody>
+      </p:sp>
+      <p:sp>
+        <p:nvSpPr>
+          <p:cNvPr id="3" name="TextBox 2"/>
+          <p:cNvSpPr txBox="1"/>
+          <p:nvPr/>
+        </p:nvSpPr>
+        <p:spPr>
+          <a:xfrm>
+            <a:off x="640080" y="1280160"/>
+            <a:ext cx="10881360" cy="5120640"/>
+          </a:xfrm>
+          <a:prstGeom prst="rect">
+            <a:avLst/>
+          </a:prstGeom>
+          <a:noFill/>
+        </p:spPr>
+        <p:txBody>
+          <a:bodyPr wrap="square">
+            <a:spAutoFit/>
+          </a:bodyPr>
+          <a:lstStyle/>
+          <a:p>
+            <a:pPr/>
+            <a:r>
+              <a:rPr sz="2200" b="1">
+                <a:solidFill>
+                  <a:srgbClr val="2B6CB0"/>
+                </a:solidFill>
+                <a:latin typeface="Calibri"/>
+              </a:rPr>
+              <a:t>Tracing the countdown loop with input 3</a:t>
+            </a:r>
+          </a:p>
+          <a:p>
+            <a:pPr lvl="1"/>
+            <a:r>
+              <a:rPr sz="1900" b="0">
+                <a:solidFill>
+                  <a:srgbClr val="222222"/>
+                </a:solidFill>
+                <a:latin typeface="Calibri"/>
+              </a:rPr>
+              <a:t>1. Program: INP, then LOOP OUT, SUB ONE, BRP LOOP, HLT, with ONE DAT 1.</a:t>
+            </a:r>
+          </a:p>
+          <a:p>
+            <a:pPr lvl="1"/>
+            <a:r>
+              <a:rPr sz="1900" b="0">
+                <a:solidFill>
+                  <a:srgbClr val="222222"/>
+                </a:solidFill>
+                <a:latin typeface="Calibri"/>
+              </a:rPr>
+              <a:t>2. INP: accumulator = 3. OUT prints 3. SUB ONE: accumulator = 2. BRP: 2 is positive, branch to LOOP.</a:t>
+            </a:r>
+          </a:p>
+          <a:p>
+            <a:pPr lvl="1"/>
+            <a:r>
+              <a:rPr sz="1900" b="0">
+                <a:solidFill>
+                  <a:srgbClr val="222222"/>
+                </a:solidFill>
+                <a:latin typeface="Calibri"/>
+              </a:rPr>
+              <a:t>3. OUT prints 2. SUB ONE: accumulator = 1. BRP: 1 is positive, branch to LOOP.</a:t>
+            </a:r>
+          </a:p>
+          <a:p>
+            <a:pPr lvl="1"/>
+            <a:r>
+              <a:rPr sz="1900" b="0">
+                <a:solidFill>
+                  <a:srgbClr val="222222"/>
+                </a:solidFill>
+                <a:latin typeface="Calibri"/>
+              </a:rPr>
+              <a:t>4. OUT prints 1. SUB ONE: accumulator = 0. BRP: 0 counts as positive, branch to LOOP.</a:t>
+            </a:r>
+          </a:p>
+          <a:p>
+            <a:pPr lvl="1"/>
+            <a:r>
+              <a:rPr sz="1900" b="0">
+                <a:solidFill>
+                  <a:srgbClr val="222222"/>
+                </a:solidFill>
+                <a:latin typeface="Calibri"/>
+              </a:rPr>
+              <a:t>5. OUT prints 0. SUB ONE: accumulator = -1. BRP: negative, so the branch is not taken.</a:t>
+            </a:r>
+          </a:p>
+          <a:p>
+            <a:pPr lvl="1"/>
+            <a:r>
+              <a:rPr sz="1900" b="0">
+                <a:solidFill>
+                  <a:srgbClr val="222222"/>
+                </a:solidFill>
+                <a:latin typeface="Calibri"/>
+              </a:rPr>
+              <a:t>6. HLT stops the program; the outputs were 3, 2, 1, 0.</a:t>
+            </a:r>
+          </a:p>
+          <a:p>
+            <a:pPr lvl="1"/>
+            <a:r>
+              <a:rPr sz="1900" b="0">
+                <a:solidFill>
+                  <a:srgbClr val="222222"/>
+                </a:solidFill>
+                <a:latin typeface="Calibri"/>
+              </a:rPr>
+              <a:t>7. Key point: 0 is printed because BRP branches while the accumulator is zero or positive.</a:t>
+            </a:r>
+          </a:p>
+        </p:txBody>
+      </p:sp>
+    </p:spTree>
+  </p:cSld>
+  <p:clrMapOvr>
+    <a:masterClrMapping/>
+  </p:clrMapOvr>
+</p:sld>
+</file>
+
+<file path=ppt/slides/slide18.xml><?xml version="1.0" encoding="utf-8"?>
+<p:sld xmlns:a="http://schemas.openxmlformats.org/drawingml/2006/main" xmlns:p="http://schemas.openxmlformats.org/presentationml/2006/main" xmlns:r="http://schemas.openxmlformats.org/officeDocument/2006/relationships">
+  <p:cSld>
+    <p:bg>
+      <p:bgPr>
+        <a:solidFill>
+          <a:srgbClr val="FFFFFF"/>
+        </a:solidFill>
+        <a:effectLst/>
+      </p:bgPr>
+    </p:bg>
+    <p:spTree>
+      <p:nvGrpSpPr>
+        <p:cNvPr id="1" name=""/>
+        <p:cNvGrpSpPr/>
+        <p:nvPr/>
+      </p:nvGrpSpPr>
+      <p:grpSpPr/>
+      <p:sp>
+        <p:nvSpPr>
+          <p:cNvPr id="2" name="TextBox 1"/>
+          <p:cNvSpPr txBox="1"/>
+          <p:nvPr/>
+        </p:nvSpPr>
+        <p:spPr>
+          <a:xfrm>
+            <a:off x="548640" y="274320"/>
+            <a:ext cx="11064240" cy="822960"/>
+          </a:xfrm>
+          <a:prstGeom prst="rect">
+            <a:avLst/>
+          </a:prstGeom>
+          <a:noFill/>
+        </p:spPr>
+        <p:txBody>
+          <a:bodyPr wrap="square">
+            <a:spAutoFit/>
+          </a:bodyPr>
+          <a:lstStyle/>
+          <a:p>
+            <a:r>
+              <a:rPr sz="3000" b="1" i="0">
+                <a:solidFill>
+                  <a:srgbClr val="2B6CB0"/>
+                </a:solidFill>
+                <a:latin typeface="Calibri"/>
+              </a:rPr>
+              <a:t>Worked example 3</a:t>
+            </a:r>
+          </a:p>
+        </p:txBody>
+      </p:sp>
+      <p:sp>
+        <p:nvSpPr>
+          <p:cNvPr id="3" name="TextBox 2"/>
+          <p:cNvSpPr txBox="1"/>
+          <p:nvPr/>
+        </p:nvSpPr>
+        <p:spPr>
+          <a:xfrm>
+            <a:off x="640080" y="1280160"/>
+            <a:ext cx="10881360" cy="5120640"/>
+          </a:xfrm>
+          <a:prstGeom prst="rect">
+            <a:avLst/>
+          </a:prstGeom>
+          <a:noFill/>
+        </p:spPr>
+        <p:txBody>
+          <a:bodyPr wrap="square">
+            <a:spAutoFit/>
+          </a:bodyPr>
+          <a:lstStyle/>
+          <a:p>
+            <a:pPr/>
+            <a:r>
+              <a:rPr sz="2200" b="1">
+                <a:solidFill>
+                  <a:srgbClr val="2B6CB0"/>
+                </a:solidFill>
+                <a:latin typeface="Calibri"/>
+              </a:rPr>
+              <a:t>One instruction, four addressing modes</a:t>
+            </a:r>
+          </a:p>
+          <a:p>
+            <a:pPr lvl="1"/>
+            <a:r>
+              <a:rPr sz="1900" b="0">
+                <a:solidFill>
+                  <a:srgbClr val="222222"/>
+                </a:solidFill>
+                <a:latin typeface="Calibri"/>
+              </a:rPr>
+              <a:t>1. Setup: instruction LDA 6; address 6 holds 9; address 9 holds 4; address 8 holds 15; index register holds 2.</a:t>
+            </a:r>
+          </a:p>
+          <a:p>
+            <a:pPr lvl="1"/>
+            <a:r>
+              <a:rPr sz="1900" b="0">
+                <a:solidFill>
+                  <a:srgbClr val="222222"/>
+                </a:solidFill>
+                <a:latin typeface="Calibri"/>
+              </a:rPr>
+              <a:t>2. Immediate: the operand is the value, so the accumulator is loaded with 6.</a:t>
+            </a:r>
+          </a:p>
+          <a:p>
+            <a:pPr lvl="1"/>
+            <a:r>
+              <a:rPr sz="1900" b="0">
+                <a:solidFill>
+                  <a:srgbClr val="222222"/>
+                </a:solidFill>
+                <a:latin typeface="Calibri"/>
+              </a:rPr>
+              <a:t>3. Direct: one lookup at address 6, so the value loaded is 9.</a:t>
+            </a:r>
+          </a:p>
+          <a:p>
+            <a:pPr lvl="1"/>
+            <a:r>
+              <a:rPr sz="1900" b="0">
+                <a:solidFill>
+                  <a:srgbClr val="222222"/>
+                </a:solidFill>
+                <a:latin typeface="Calibri"/>
+              </a:rPr>
+              <a:t>4. Indirect: address 6 holds 9, so go to address 9; the value loaded is 4.</a:t>
+            </a:r>
+          </a:p>
+          <a:p>
+            <a:pPr lvl="1"/>
+            <a:r>
+              <a:rPr sz="1900" b="0">
+                <a:solidFill>
+                  <a:srgbClr val="222222"/>
+                </a:solidFill>
+                <a:latin typeface="Calibri"/>
+              </a:rPr>
+              <a:t>5. Indexed: effective address = 6 + 2 = 8; address 8 holds 15, so the value loaded is 15.</a:t>
+            </a:r>
+          </a:p>
+          <a:p>
+            <a:pPr lvl="1"/>
+            <a:r>
+              <a:rPr sz="1900" b="0">
+                <a:solidFill>
+                  <a:srgbClr val="222222"/>
+                </a:solidFill>
+                <a:latin typeface="Calibri"/>
+              </a:rPr>
+              <a:t>6. Check: no lookup, one lookup, two lookups, base plus index — four different values from one operand.</a:t>
+            </a:r>
+          </a:p>
+        </p:txBody>
+      </p:sp>
+    </p:spTree>
+  </p:cSld>
+  <p:clrMapOvr>
+    <a:masterClrMapping/>
+  </p:clrMapOvr>
+</p:sld>
+</file>
+
+<file path=ppt/slides/slide19.xml><?xml version="1.0" encoding="utf-8"?>
+<p:sld xmlns:a="http://schemas.openxmlformats.org/drawingml/2006/main" xmlns:p="http://schemas.openxmlformats.org/presentationml/2006/main" xmlns:r="http://schemas.openxmlformats.org/officeDocument/2006/relationships">
+  <p:cSld>
+    <p:bg>
+      <p:bgPr>
+        <a:solidFill>
+          <a:srgbClr val="FFFFFF"/>
+        </a:solidFill>
+        <a:effectLst/>
+      </p:bgPr>
+    </p:bg>
+    <p:spTree>
+      <p:nvGrpSpPr>
+        <p:cNvPr id="1" name=""/>
+        <p:cNvGrpSpPr/>
+        <p:nvPr/>
+      </p:nvGrpSpPr>
+      <p:grpSpPr/>
+      <p:sp>
+        <p:nvSpPr>
+          <p:cNvPr id="2" name="TextBox 1"/>
+          <p:cNvSpPr txBox="1"/>
+          <p:nvPr/>
+        </p:nvSpPr>
+        <p:spPr>
+          <a:xfrm>
+            <a:off x="548640" y="274320"/>
+            <a:ext cx="11064240" cy="822960"/>
+          </a:xfrm>
+          <a:prstGeom prst="rect">
+            <a:avLst/>
+          </a:prstGeom>
+          <a:noFill/>
+        </p:spPr>
+        <p:txBody>
+          <a:bodyPr wrap="square">
+            <a:spAutoFit/>
+          </a:bodyPr>
+          <a:lstStyle/>
+          <a:p>
+            <a:r>
+              <a:rPr sz="3000" b="1" i="0">
+                <a:solidFill>
+                  <a:srgbClr val="2B6CB0"/>
+                </a:solidFill>
+                <a:latin typeface="Calibri"/>
+              </a:rPr>
+              <a:t>Activity 1</a:t>
+            </a:r>
+          </a:p>
+        </p:txBody>
+      </p:sp>
+      <p:sp>
+        <p:nvSpPr>
+          <p:cNvPr id="3" name="TextBox 2"/>
+          <p:cNvSpPr txBox="1"/>
+          <p:nvPr/>
+        </p:nvSpPr>
+        <p:spPr>
+          <a:xfrm>
+            <a:off x="640080" y="1280160"/>
+            <a:ext cx="10881360" cy="5120640"/>
+          </a:xfrm>
+          <a:prstGeom prst="rect">
+            <a:avLst/>
+          </a:prstGeom>
+          <a:noFill/>
+        </p:spPr>
+        <p:txBody>
+          <a:bodyPr wrap="square">
+            <a:spAutoFit/>
+          </a:bodyPr>
+          <a:lstStyle/>
+          <a:p>
+            <a:pPr/>
+            <a:r>
+              <a:rPr sz="2200" b="1">
+                <a:solidFill>
+                  <a:srgbClr val="2B6CB0"/>
+                </a:solidFill>
+                <a:latin typeface="Calibri"/>
+              </a:rPr>
+              <a:t>The human LMC  (15 min)</a:t>
+            </a:r>
+          </a:p>
+          <a:p>
+            <a:pPr lvl="1"/>
+            <a:r>
+              <a:rPr sz="2000" b="0">
+                <a:solidFill>
+                  <a:srgbClr val="222222"/>
+                </a:solidFill>
+                <a:latin typeface="Calibri"/>
+              </a:rPr>
+              <a:t>Lay instruction cards at desks as mailboxes 0 to 5: INP; LOOP OUT; SUB ONE; BRP LOOP; HLT; ONE DAT 1.</a:t>
+            </a:r>
+          </a:p>
+          <a:p>
+            <a:pPr lvl="1"/>
+            <a:r>
+              <a:rPr sz="2000" b="0">
+                <a:solidFill>
+                  <a:srgbClr val="222222"/>
+                </a:solidFill>
+                <a:latin typeface="Calibri"/>
+              </a:rPr>
+              <a:t>Cast one student as the Little Man, one as the accumulator holding a whiteboard, one as the program counter; the class are verifiers logging every output and accumulator value.</a:t>
+            </a:r>
+          </a:p>
+          <a:p>
+            <a:pPr lvl="1"/>
+            <a:r>
+              <a:rPr sz="2000" b="0">
+                <a:solidFill>
+                  <a:srgbClr val="222222"/>
+                </a:solidFill>
+                <a:latin typeface="Calibri"/>
+              </a:rPr>
+              <a:t>Give input 3; the Little Man performs each fetch-decode-execute cycle aloud, with the program counter incrementing after each fetch.</a:t>
+            </a:r>
+          </a:p>
+          <a:p>
+            <a:pPr lvl="1"/>
+            <a:r>
+              <a:rPr sz="2000" b="0">
+                <a:solidFill>
+                  <a:srgbClr val="222222"/>
+                </a:solidFill>
+                <a:latin typeface="Calibri"/>
+              </a:rPr>
+              <a:t>At BRP the Little Man must ask the accumulator whether it is zero or positive before changing the program counter; the class predicts the answer first.</a:t>
+            </a:r>
+          </a:p>
+          <a:p>
+            <a:pPr lvl="1"/>
+            <a:r>
+              <a:rPr sz="2000" b="0">
+                <a:solidFill>
+                  <a:srgbClr val="222222"/>
+                </a:solidFill>
+                <a:latin typeface="Calibri"/>
+              </a:rPr>
+              <a:t>Run to HLT, then ask why 0 was output but -1 was not.</a:t>
+            </a:r>
+          </a:p>
+          <a:p>
+            <a:pPr/>
+            <a:r>
+              <a:rPr sz="1800" b="0">
                 <a:solidFill>
                   <a:srgbClr val="B76E00"/>
                 </a:solidFill>
                 <a:latin typeface="Calibri"/>
               </a:rPr>
-              <a:t>Answer: Class: a template defining attributes and methods; object: a specific instance of a class; method: a subroutine of a class defining its behaviour.</a:t>
-            </a:r>
-          </a:p>
-          <a:p>
-            <a:r>
-              <a:rPr sz="2200" b="1">
-                <a:solidFill>
-                  <a:srgbClr val="222222"/>
-                </a:solidFill>
-                <a:latin typeface="Calibri"/>
-              </a:rPr>
-              <a:t>2. For LDA 6 where address 6 holds 9 and address 9 holds 4, what is loaded in direct and in indirect mode?</a:t>
-            </a:r>
-          </a:p>
-          <a:p>
-            <a:pPr lvl="1"/>
-            <a:r>
-              <a:rPr sz="1800" i="1">
-                <a:solidFill>
-                  <a:srgbClr val="B76E00"/>
-                </a:solidFill>
-                <a:latin typeface="Calibri"/>
-              </a:rPr>
-              <a:t>Answer: Direct loads 9 (the value at address 6); indirect loads 4 (address 6 points to address 9, whose value is 4).</a:t>
-            </a:r>
-          </a:p>
-          <a:p>
-            <a:r>
-              <a:rPr sz="2200" b="1">
-                <a:solidFill>
-                  <a:srgbClr val="222222"/>
-                </a:solidFill>
-                <a:latin typeface="Calibri"/>
-              </a:rPr>
-              <a:t>3. What is encapsulation and one benefit it provides?</a:t>
-            </a:r>
-          </a:p>
-          <a:p>
-            <a:pPr lvl="1"/>
-            <a:r>
-              <a:rPr sz="1800" i="1">
-                <a:solidFill>
-                  <a:srgbClr val="B76E00"/>
-                </a:solidFill>
-                <a:latin typeface="Calibri"/>
-              </a:rPr>
-              <a:t>Answer: Bundling data with its methods and hiding the data via private attributes; it protects data from invalid changes and eases maintenance.</a:t>
+              <a:t>Stretch: Ask what single change would stop the countdown at 1 instead of 0, and have the class trace their proposed fix to prove it.</a:t>
             </a:r>
           </a:p>
         </p:txBody>
@@ -3854,7 +5168,7 @@
                 </a:solidFill>
                 <a:latin typeface="Calibri"/>
               </a:rPr>
-              <a:t>Explain what a programming paradigm is and describe the procedural and low-level (assembly) approaches.</a:t>
+              <a:t>Explain the need for programming paradigms and characterise procedural and object-oriented programming.</a:t>
             </a:r>
           </a:p>
           <a:p>
@@ -3866,7 +5180,7 @@
                 </a:solidFill>
                 <a:latin typeface="Calibri"/>
               </a:rPr>
-              <a:t>Apply the four addressing modes (immediate, direct, indirect, indexed) to determine the value loaded.</a:t>
+              <a:t>Write and trace short Little Man Computer programs using the standard instruction set.</a:t>
             </a:r>
           </a:p>
           <a:p>
@@ -3878,7 +5192,1453 @@
                 </a:solidFill>
                 <a:latin typeface="Calibri"/>
               </a:rPr>
-              <a:t>Define the key object-oriented concepts and apply inheritance and polymorphism to a scenario.</a:t>
+              <a:t>Determine the value used by an instruction under immediate, direct, indirect and indexed addressing.</a:t>
+            </a:r>
+          </a:p>
+          <a:p>
+            <a:pPr lvl="1"/>
+            <a:r>
+              <a:rPr sz="2200" b="0">
+                <a:solidFill>
+                  <a:srgbClr val="222222"/>
+                </a:solidFill>
+                <a:latin typeface="Calibri"/>
+              </a:rPr>
+              <a:t>Define and apply class, object, method, attribute, inheritance, encapsulation and polymorphism.</a:t>
+            </a:r>
+          </a:p>
+        </p:txBody>
+      </p:sp>
+    </p:spTree>
+  </p:cSld>
+  <p:clrMapOvr>
+    <a:masterClrMapping/>
+  </p:clrMapOvr>
+</p:sld>
+</file>
+
+<file path=ppt/slides/slide20.xml><?xml version="1.0" encoding="utf-8"?>
+<p:sld xmlns:a="http://schemas.openxmlformats.org/drawingml/2006/main" xmlns:p="http://schemas.openxmlformats.org/presentationml/2006/main" xmlns:r="http://schemas.openxmlformats.org/officeDocument/2006/relationships">
+  <p:cSld>
+    <p:bg>
+      <p:bgPr>
+        <a:solidFill>
+          <a:srgbClr val="FFFFFF"/>
+        </a:solidFill>
+        <a:effectLst/>
+      </p:bgPr>
+    </p:bg>
+    <p:spTree>
+      <p:nvGrpSpPr>
+        <p:cNvPr id="1" name=""/>
+        <p:cNvGrpSpPr/>
+        <p:nvPr/>
+      </p:nvGrpSpPr>
+      <p:grpSpPr/>
+      <p:sp>
+        <p:nvSpPr>
+          <p:cNvPr id="2" name="TextBox 1"/>
+          <p:cNvSpPr txBox="1"/>
+          <p:nvPr/>
+        </p:nvSpPr>
+        <p:spPr>
+          <a:xfrm>
+            <a:off x="548640" y="274320"/>
+            <a:ext cx="11064240" cy="822960"/>
+          </a:xfrm>
+          <a:prstGeom prst="rect">
+            <a:avLst/>
+          </a:prstGeom>
+          <a:noFill/>
+        </p:spPr>
+        <p:txBody>
+          <a:bodyPr wrap="square">
+            <a:spAutoFit/>
+          </a:bodyPr>
+          <a:lstStyle/>
+          <a:p>
+            <a:r>
+              <a:rPr sz="3000" b="1" i="0">
+                <a:solidFill>
+                  <a:srgbClr val="2B6CB0"/>
+                </a:solidFill>
+                <a:latin typeface="Calibri"/>
+              </a:rPr>
+              <a:t>Activity 2</a:t>
+            </a:r>
+          </a:p>
+        </p:txBody>
+      </p:sp>
+      <p:sp>
+        <p:nvSpPr>
+          <p:cNvPr id="3" name="TextBox 2"/>
+          <p:cNvSpPr txBox="1"/>
+          <p:nvPr/>
+        </p:nvSpPr>
+        <p:spPr>
+          <a:xfrm>
+            <a:off x="640080" y="1280160"/>
+            <a:ext cx="10881360" cy="5120640"/>
+          </a:xfrm>
+          <a:prstGeom prst="rect">
+            <a:avLst/>
+          </a:prstGeom>
+          <a:noFill/>
+        </p:spPr>
+        <p:txBody>
+          <a:bodyPr wrap="square">
+            <a:spAutoFit/>
+          </a:bodyPr>
+          <a:lstStyle/>
+          <a:p>
+            <a:pPr/>
+            <a:r>
+              <a:rPr sz="2200" b="1">
+                <a:solidFill>
+                  <a:srgbClr val="2B6CB0"/>
+                </a:solidFill>
+                <a:latin typeface="Calibri"/>
+              </a:rPr>
+              <a:t>Addressing modes four corners  (10 min)</a:t>
+            </a:r>
+          </a:p>
+          <a:p>
+            <a:pPr lvl="1"/>
+            <a:r>
+              <a:rPr sz="2000" b="0">
+                <a:solidFill>
+                  <a:srgbClr val="222222"/>
+                </a:solidFill>
+                <a:latin typeface="Calibri"/>
+              </a:rPr>
+              <a:t>Label the corners IMMEDIATE, DIRECT, INDIRECT, INDEXED and project the memory table: address 20 holds 35, address 35 holds 99, address 23 holds 7, index register 3.</a:t>
+            </a:r>
+          </a:p>
+          <a:p>
+            <a:pPr lvl="1"/>
+            <a:r>
+              <a:rPr sz="2000" b="0">
+                <a:solidFill>
+                  <a:srgbClr val="222222"/>
+                </a:solidFill>
+                <a:latin typeface="Calibri"/>
+              </a:rPr>
+              <a:t>Say: the instruction is LDA 20 and I want the value 20 in the accumulator; students move to the mode that delivers it. Repeat for wanting 35, then 99, then 7.</a:t>
+            </a:r>
+          </a:p>
+          <a:p>
+            <a:pPr lvl="1"/>
+            <a:r>
+              <a:rPr sz="2000" b="0">
+                <a:solidFill>
+                  <a:srgbClr val="222222"/>
+                </a:solidFill>
+                <a:latin typeface="Calibri"/>
+              </a:rPr>
+              <a:t>Minority corners argue their case before each reveal; the majority must state the rule, not just the answer.</a:t>
+            </a:r>
+          </a:p>
+          <a:p>
+            <a:pPr lvl="1"/>
+            <a:r>
+              <a:rPr sz="2000" b="0">
+                <a:solidFill>
+                  <a:srgbClr val="222222"/>
+                </a:solidFill>
+                <a:latin typeface="Calibri"/>
+              </a:rPr>
+              <a:t>Application round: which corner for traversing an array, and which for following a pointer?</a:t>
+            </a:r>
+          </a:p>
+          <a:p>
+            <a:pPr/>
+            <a:r>
+              <a:rPr sz="1800" b="0">
+                <a:solidFill>
+                  <a:srgbClr val="B76E00"/>
+                </a:solidFill>
+                <a:latin typeface="Calibri"/>
+              </a:rPr>
+              <a:t>Stretch: Invent a memory state where direct and indirect load the same value, and explain what address 20 must then contain: an address that stores itself.</a:t>
+            </a:r>
+          </a:p>
+        </p:txBody>
+      </p:sp>
+    </p:spTree>
+  </p:cSld>
+  <p:clrMapOvr>
+    <a:masterClrMapping/>
+  </p:clrMapOvr>
+</p:sld>
+</file>
+
+<file path=ppt/slides/slide21.xml><?xml version="1.0" encoding="utf-8"?>
+<p:sld xmlns:a="http://schemas.openxmlformats.org/drawingml/2006/main" xmlns:p="http://schemas.openxmlformats.org/presentationml/2006/main" xmlns:r="http://schemas.openxmlformats.org/officeDocument/2006/relationships">
+  <p:cSld>
+    <p:bg>
+      <p:bgPr>
+        <a:solidFill>
+          <a:srgbClr val="FFFFFF"/>
+        </a:solidFill>
+        <a:effectLst/>
+      </p:bgPr>
+    </p:bg>
+    <p:spTree>
+      <p:nvGrpSpPr>
+        <p:cNvPr id="1" name=""/>
+        <p:cNvGrpSpPr/>
+        <p:nvPr/>
+      </p:nvGrpSpPr>
+      <p:grpSpPr/>
+      <p:sp>
+        <p:nvSpPr>
+          <p:cNvPr id="2" name="TextBox 1"/>
+          <p:cNvSpPr txBox="1"/>
+          <p:nvPr/>
+        </p:nvSpPr>
+        <p:spPr>
+          <a:xfrm>
+            <a:off x="548640" y="274320"/>
+            <a:ext cx="11064240" cy="822960"/>
+          </a:xfrm>
+          <a:prstGeom prst="rect">
+            <a:avLst/>
+          </a:prstGeom>
+          <a:noFill/>
+        </p:spPr>
+        <p:txBody>
+          <a:bodyPr wrap="square">
+            <a:spAutoFit/>
+          </a:bodyPr>
+          <a:lstStyle/>
+          <a:p>
+            <a:r>
+              <a:rPr sz="3000" b="1" i="0">
+                <a:solidFill>
+                  <a:srgbClr val="2B6CB0"/>
+                </a:solidFill>
+                <a:latin typeface="Calibri"/>
+              </a:rPr>
+              <a:t>Activity 3</a:t>
+            </a:r>
+          </a:p>
+        </p:txBody>
+      </p:sp>
+      <p:sp>
+        <p:nvSpPr>
+          <p:cNvPr id="3" name="TextBox 2"/>
+          <p:cNvSpPr txBox="1"/>
+          <p:nvPr/>
+        </p:nvSpPr>
+        <p:spPr>
+          <a:xfrm>
+            <a:off x="640080" y="1280160"/>
+            <a:ext cx="10881360" cy="5120640"/>
+          </a:xfrm>
+          <a:prstGeom prst="rect">
+            <a:avLst/>
+          </a:prstGeom>
+          <a:noFill/>
+        </p:spPr>
+        <p:txBody>
+          <a:bodyPr wrap="square">
+            <a:spAutoFit/>
+          </a:bodyPr>
+          <a:lstStyle/>
+          <a:p>
+            <a:pPr/>
+            <a:r>
+              <a:rPr sz="2200" b="1">
+                <a:solidFill>
+                  <a:srgbClr val="2B6CB0"/>
+                </a:solidFill>
+                <a:latin typeface="Calibri"/>
+              </a:rPr>
+              <a:t>Whiteboard quick-draw: class diagram from spec  (10 min)</a:t>
+            </a:r>
+          </a:p>
+          <a:p>
+            <a:pPr lvl="1"/>
+            <a:r>
+              <a:rPr sz="2000" b="0">
+                <a:solidFill>
+                  <a:srgbClr val="222222"/>
+                </a:solidFill>
+                <a:latin typeface="Calibri"/>
+              </a:rPr>
+              <a:t>Read this spec aloud twice, without showing it: a Vehicle class has a private attribute speed and public methods accelerate() and getSpeed(); ElectricCar inherits from Vehicle, adds a private attribute charge, and overrides accelerate().</a:t>
+            </a:r>
+          </a:p>
+          <a:p>
+            <a:pPr lvl="1"/>
+            <a:r>
+              <a:rPr sz="2000" b="0">
+                <a:solidFill>
+                  <a:srgbClr val="222222"/>
+                </a:solidFill>
+                <a:latin typeface="Calibri"/>
+              </a:rPr>
+              <a:t>Students draw the full class diagram from the spoken spec only, then show boards for peer marking.</a:t>
+            </a:r>
+          </a:p>
+          <a:p>
+            <a:pPr lvl="1"/>
+            <a:r>
+              <a:rPr sz="2000" b="0">
+                <a:solidFill>
+                  <a:srgbClr val="222222"/>
+                </a:solidFill>
+                <a:latin typeface="Calibri"/>
+              </a:rPr>
+              <a:t>Everyone checks two details specifically: the inheritance arrow points from child to parent, and minus and plus mark private and public correctly.</a:t>
+            </a:r>
+          </a:p>
+          <a:p>
+            <a:pPr lvl="1"/>
+            <a:r>
+              <a:rPr sz="2000" b="0">
+                <a:solidFill>
+                  <a:srgbClr val="222222"/>
+                </a:solidFill>
+                <a:latin typeface="Calibri"/>
+              </a:rPr>
+              <a:t>Redraw from memory in 90 seconds and compare with the first attempt.</a:t>
+            </a:r>
+          </a:p>
+          <a:p>
+            <a:pPr/>
+            <a:r>
+              <a:rPr sz="1800" b="0">
+                <a:solidFill>
+                  <a:srgbClr val="B76E00"/>
+                </a:solidFill>
+                <a:latin typeface="Calibri"/>
+              </a:rPr>
+              <a:t>Stretch: Add a Bicycle subclass that makes accelerate() polymorphic across three classes, and annotate why encapsulation forces getSpeed() to exist at all.</a:t>
+            </a:r>
+          </a:p>
+        </p:txBody>
+      </p:sp>
+    </p:spTree>
+  </p:cSld>
+  <p:clrMapOvr>
+    <a:masterClrMapping/>
+  </p:clrMapOvr>
+</p:sld>
+</file>
+
+<file path=ppt/slides/slide22.xml><?xml version="1.0" encoding="utf-8"?>
+<p:sld xmlns:a="http://schemas.openxmlformats.org/drawingml/2006/main" xmlns:p="http://schemas.openxmlformats.org/presentationml/2006/main" xmlns:r="http://schemas.openxmlformats.org/officeDocument/2006/relationships">
+  <p:cSld>
+    <p:bg>
+      <p:bgPr>
+        <a:solidFill>
+          <a:srgbClr val="FFFFFF"/>
+        </a:solidFill>
+        <a:effectLst/>
+      </p:bgPr>
+    </p:bg>
+    <p:spTree>
+      <p:nvGrpSpPr>
+        <p:cNvPr id="1" name=""/>
+        <p:cNvGrpSpPr/>
+        <p:nvPr/>
+      </p:nvGrpSpPr>
+      <p:grpSpPr/>
+      <p:sp>
+        <p:nvSpPr>
+          <p:cNvPr id="2" name="TextBox 1"/>
+          <p:cNvSpPr txBox="1"/>
+          <p:nvPr/>
+        </p:nvSpPr>
+        <p:spPr>
+          <a:xfrm>
+            <a:off x="548640" y="274320"/>
+            <a:ext cx="11064240" cy="822960"/>
+          </a:xfrm>
+          <a:prstGeom prst="rect">
+            <a:avLst/>
+          </a:prstGeom>
+          <a:noFill/>
+        </p:spPr>
+        <p:txBody>
+          <a:bodyPr wrap="square">
+            <a:spAutoFit/>
+          </a:bodyPr>
+          <a:lstStyle/>
+          <a:p>
+            <a:r>
+              <a:rPr sz="3000" b="1" i="0">
+                <a:solidFill>
+                  <a:srgbClr val="2B6CB0"/>
+                </a:solidFill>
+                <a:latin typeface="Calibri"/>
+              </a:rPr>
+              <a:t>Practice (1-4)</a:t>
+            </a:r>
+          </a:p>
+        </p:txBody>
+      </p:sp>
+      <p:sp>
+        <p:nvSpPr>
+          <p:cNvPr id="3" name="TextBox 2"/>
+          <p:cNvSpPr txBox="1"/>
+          <p:nvPr/>
+        </p:nvSpPr>
+        <p:spPr>
+          <a:xfrm>
+            <a:off x="640080" y="1280160"/>
+            <a:ext cx="10881360" cy="5120640"/>
+          </a:xfrm>
+          <a:prstGeom prst="rect">
+            <a:avLst/>
+          </a:prstGeom>
+          <a:noFill/>
+        </p:spPr>
+        <p:txBody>
+          <a:bodyPr wrap="square">
+            <a:spAutoFit/>
+          </a:bodyPr>
+          <a:lstStyle/>
+          <a:p>
+            <a:r>
+              <a:rPr sz="2000" b="1">
+                <a:solidFill>
+                  <a:srgbClr val="222222"/>
+                </a:solidFill>
+                <a:latin typeface="Calibri"/>
+              </a:rPr>
+              <a:t>1. Write an LMC program that inputs two numbers and outputs the first minus the second. (4)</a:t>
+            </a:r>
+          </a:p>
+          <a:p>
+            <a:r>
+              <a:rPr sz="2000" b="1">
+                <a:solidFill>
+                  <a:srgbClr val="222222"/>
+                </a:solidFill>
+                <a:latin typeface="Calibri"/>
+              </a:rPr>
+              <a:t>2. An instruction has opcode ADD and operand 20. Memory address 20 holds 35, address 35 holds 99, address 23 holds 7 and the index register holds 3. State the value added under immediate, direct, indirect and indexed addressing. (4)</a:t>
+            </a:r>
+          </a:p>
+          <a:p>
+            <a:r>
+              <a:rPr sz="2000" b="1">
+                <a:solidFill>
+                  <a:srgbClr val="222222"/>
+                </a:solidFill>
+                <a:latin typeface="Calibri"/>
+              </a:rPr>
+              <a:t>3. State what the LMC instructions STA and BRZ do. (2)</a:t>
+            </a:r>
+          </a:p>
+          <a:p>
+            <a:r>
+              <a:rPr sz="2000" b="1">
+                <a:solidFill>
+                  <a:srgbClr val="222222"/>
+                </a:solidFill>
+                <a:latin typeface="Calibri"/>
+              </a:rPr>
+              <a:t>4. Explain why a device driver might be written in assembly language rather than a high-level language. (3)</a:t>
+            </a:r>
+          </a:p>
+        </p:txBody>
+      </p:sp>
+    </p:spTree>
+  </p:cSld>
+  <p:clrMapOvr>
+    <a:masterClrMapping/>
+  </p:clrMapOvr>
+</p:sld>
+</file>
+
+<file path=ppt/slides/slide23.xml><?xml version="1.0" encoding="utf-8"?>
+<p:sld xmlns:a="http://schemas.openxmlformats.org/drawingml/2006/main" xmlns:p="http://schemas.openxmlformats.org/presentationml/2006/main" xmlns:r="http://schemas.openxmlformats.org/officeDocument/2006/relationships">
+  <p:cSld>
+    <p:bg>
+      <p:bgPr>
+        <a:solidFill>
+          <a:srgbClr val="FFFFFF"/>
+        </a:solidFill>
+        <a:effectLst/>
+      </p:bgPr>
+    </p:bg>
+    <p:spTree>
+      <p:nvGrpSpPr>
+        <p:cNvPr id="1" name=""/>
+        <p:cNvGrpSpPr/>
+        <p:nvPr/>
+      </p:nvGrpSpPr>
+      <p:grpSpPr/>
+      <p:sp>
+        <p:nvSpPr>
+          <p:cNvPr id="2" name="TextBox 1"/>
+          <p:cNvSpPr txBox="1"/>
+          <p:nvPr/>
+        </p:nvSpPr>
+        <p:spPr>
+          <a:xfrm>
+            <a:off x="548640" y="274320"/>
+            <a:ext cx="11064240" cy="822960"/>
+          </a:xfrm>
+          <a:prstGeom prst="rect">
+            <a:avLst/>
+          </a:prstGeom>
+          <a:noFill/>
+        </p:spPr>
+        <p:txBody>
+          <a:bodyPr wrap="square">
+            <a:spAutoFit/>
+          </a:bodyPr>
+          <a:lstStyle/>
+          <a:p>
+            <a:r>
+              <a:rPr sz="3000" b="1" i="0">
+                <a:solidFill>
+                  <a:srgbClr val="2B6CB0"/>
+                </a:solidFill>
+                <a:latin typeface="Calibri"/>
+              </a:rPr>
+              <a:t>Practice — answers (1-4)</a:t>
+            </a:r>
+          </a:p>
+        </p:txBody>
+      </p:sp>
+      <p:sp>
+        <p:nvSpPr>
+          <p:cNvPr id="3" name="TextBox 2"/>
+          <p:cNvSpPr txBox="1"/>
+          <p:nvPr/>
+        </p:nvSpPr>
+        <p:spPr>
+          <a:xfrm>
+            <a:off x="640080" y="1280160"/>
+            <a:ext cx="10881360" cy="5120640"/>
+          </a:xfrm>
+          <a:prstGeom prst="rect">
+            <a:avLst/>
+          </a:prstGeom>
+          <a:noFill/>
+        </p:spPr>
+        <p:txBody>
+          <a:bodyPr wrap="square">
+            <a:spAutoFit/>
+          </a:bodyPr>
+          <a:lstStyle/>
+          <a:p>
+            <a:r>
+              <a:rPr sz="2000" b="1">
+                <a:solidFill>
+                  <a:srgbClr val="222222"/>
+                </a:solidFill>
+                <a:latin typeface="Calibri"/>
+              </a:rPr>
+              <a:t>1. Write an LMC program that inputs two numbers and outputs the first minus the second. (4)</a:t>
+            </a:r>
+          </a:p>
+          <a:p>
+            <a:pPr lvl="1"/>
+            <a:r>
+              <a:rPr sz="1800" i="1">
+                <a:solidFill>
+                  <a:srgbClr val="B76E00"/>
+                </a:solidFill>
+                <a:latin typeface="Calibri"/>
+              </a:rPr>
+              <a:t>Answer: INP, STA FIRST, INP, STA SECOND, LDA FIRST, SUB SECOND, OUT, HLT, FIRST DAT, SECOND DAT. Marks: both inputs stored (1); values reloaded in the correct order (1); SUB SECOND applied to FIRST in the accumulator (1); OUT then HLT with DAT declarations (1).</a:t>
+            </a:r>
+          </a:p>
+          <a:p>
+            <a:r>
+              <a:rPr sz="2000" b="1">
+                <a:solidFill>
+                  <a:srgbClr val="222222"/>
+                </a:solidFill>
+                <a:latin typeface="Calibri"/>
+              </a:rPr>
+              <a:t>2. An instruction has opcode ADD and operand 20. Memory address 20 holds 35, address 35 holds 99, address 23 holds 7 and the index register holds 3. State the value added under immediate, direct, indirect and indexed addressing. (4)</a:t>
+            </a:r>
+          </a:p>
+          <a:p>
+            <a:pPr lvl="1"/>
+            <a:r>
+              <a:rPr sz="1800" i="1">
+                <a:solidFill>
+                  <a:srgbClr val="B76E00"/>
+                </a:solidFill>
+                <a:latin typeface="Calibri"/>
+              </a:rPr>
+              <a:t>Answer: Immediate: 20, the operand itself (1). Direct: 35, the value at address 20 (1). Indirect: 99, since address 20 holds 35 and address 35 holds 99 (1). Indexed: 7, since the effective address is 20 + 3 = 23 and address 23 holds 7 (1).</a:t>
+            </a:r>
+          </a:p>
+          <a:p>
+            <a:r>
+              <a:rPr sz="2000" b="1">
+                <a:solidFill>
+                  <a:srgbClr val="222222"/>
+                </a:solidFill>
+                <a:latin typeface="Calibri"/>
+              </a:rPr>
+              <a:t>3. State what the LMC instructions STA and BRZ do. (2)</a:t>
+            </a:r>
+          </a:p>
+          <a:p>
+            <a:pPr lvl="1"/>
+            <a:r>
+              <a:rPr sz="1800" i="1">
+                <a:solidFill>
+                  <a:srgbClr val="B76E00"/>
+                </a:solidFill>
+                <a:latin typeface="Calibri"/>
+              </a:rPr>
+              <a:t>Answer: STA stores the contents of the accumulator into the given mailbox (1); BRZ branches to the given label if the accumulator holds zero (1).</a:t>
+            </a:r>
+          </a:p>
+          <a:p>
+            <a:r>
+              <a:rPr sz="2000" b="1">
+                <a:solidFill>
+                  <a:srgbClr val="222222"/>
+                </a:solidFill>
+                <a:latin typeface="Calibri"/>
+              </a:rPr>
+              <a:t>4. Explain why a device driver might be written in assembly language rather than a high-level language. (3)</a:t>
+            </a:r>
+          </a:p>
+          <a:p>
+            <a:pPr lvl="1"/>
+            <a:r>
+              <a:rPr sz="1800" i="1">
+                <a:solidFill>
+                  <a:srgbClr val="B76E00"/>
+                </a:solidFill>
+                <a:latin typeface="Calibri"/>
+              </a:rPr>
+              <a:t>Answer: Assembly gives direct control of specific hardware registers and instructions (1); it produces small, fast code with no translator overhead deciding instruction choice (1); a driver targets one known processor, so losing portability does not matter (1).</a:t>
+            </a:r>
+          </a:p>
+        </p:txBody>
+      </p:sp>
+    </p:spTree>
+  </p:cSld>
+  <p:clrMapOvr>
+    <a:masterClrMapping/>
+  </p:clrMapOvr>
+</p:sld>
+</file>
+
+<file path=ppt/slides/slide24.xml><?xml version="1.0" encoding="utf-8"?>
+<p:sld xmlns:a="http://schemas.openxmlformats.org/drawingml/2006/main" xmlns:p="http://schemas.openxmlformats.org/presentationml/2006/main" xmlns:r="http://schemas.openxmlformats.org/officeDocument/2006/relationships">
+  <p:cSld>
+    <p:bg>
+      <p:bgPr>
+        <a:solidFill>
+          <a:srgbClr val="FFFFFF"/>
+        </a:solidFill>
+        <a:effectLst/>
+      </p:bgPr>
+    </p:bg>
+    <p:spTree>
+      <p:nvGrpSpPr>
+        <p:cNvPr id="1" name=""/>
+        <p:cNvGrpSpPr/>
+        <p:nvPr/>
+      </p:nvGrpSpPr>
+      <p:grpSpPr/>
+      <p:sp>
+        <p:nvSpPr>
+          <p:cNvPr id="2" name="TextBox 1"/>
+          <p:cNvSpPr txBox="1"/>
+          <p:nvPr/>
+        </p:nvSpPr>
+        <p:spPr>
+          <a:xfrm>
+            <a:off x="548640" y="274320"/>
+            <a:ext cx="11064240" cy="822960"/>
+          </a:xfrm>
+          <a:prstGeom prst="rect">
+            <a:avLst/>
+          </a:prstGeom>
+          <a:noFill/>
+        </p:spPr>
+        <p:txBody>
+          <a:bodyPr wrap="square">
+            <a:spAutoFit/>
+          </a:bodyPr>
+          <a:lstStyle/>
+          <a:p>
+            <a:r>
+              <a:rPr sz="3000" b="1" i="0">
+                <a:solidFill>
+                  <a:srgbClr val="2B6CB0"/>
+                </a:solidFill>
+                <a:latin typeface="Calibri"/>
+              </a:rPr>
+              <a:t>Practice (5-8)</a:t>
+            </a:r>
+          </a:p>
+        </p:txBody>
+      </p:sp>
+      <p:sp>
+        <p:nvSpPr>
+          <p:cNvPr id="3" name="TextBox 2"/>
+          <p:cNvSpPr txBox="1"/>
+          <p:nvPr/>
+        </p:nvSpPr>
+        <p:spPr>
+          <a:xfrm>
+            <a:off x="640080" y="1280160"/>
+            <a:ext cx="10881360" cy="5120640"/>
+          </a:xfrm>
+          <a:prstGeom prst="rect">
+            <a:avLst/>
+          </a:prstGeom>
+          <a:noFill/>
+        </p:spPr>
+        <p:txBody>
+          <a:bodyPr wrap="square">
+            <a:spAutoFit/>
+          </a:bodyPr>
+          <a:lstStyle/>
+          <a:p>
+            <a:r>
+              <a:rPr sz="2000" b="1">
+                <a:solidFill>
+                  <a:srgbClr val="222222"/>
+                </a:solidFill>
+                <a:latin typeface="Calibri"/>
+              </a:rPr>
+              <a:t>1. Describe the difference between a class and an object. (2)</a:t>
+            </a:r>
+          </a:p>
+          <a:p>
+            <a:r>
+              <a:rPr sz="2000" b="1">
+                <a:solidFill>
+                  <a:srgbClr val="222222"/>
+                </a:solidFill>
+                <a:latin typeface="Calibri"/>
+              </a:rPr>
+              <a:t>2. Explain how encapsulation protects the data in an object. (3)</a:t>
+            </a:r>
+          </a:p>
+          <a:p>
+            <a:r>
+              <a:rPr sz="2000" b="1">
+                <a:solidFill>
+                  <a:srgbClr val="222222"/>
+                </a:solidFill>
+                <a:latin typeface="Calibri"/>
+              </a:rPr>
+              <a:t>3. A Shape class has subclasses Circle and Square, each with its own area() method. Explain how this is an example of polymorphism. (2)</a:t>
+            </a:r>
+          </a:p>
+          <a:p>
+            <a:r>
+              <a:rPr sz="2000" b="1">
+                <a:solidFill>
+                  <a:srgbClr val="222222"/>
+                </a:solidFill>
+                <a:latin typeface="Calibri"/>
+              </a:rPr>
+              <a:t>4. The LMC program INP, STA X, INP, ADD X, ADD X, OUT, HLT (X DAT) runs with inputs 4 then 10. State the output and justify it with a trace. (3)</a:t>
+            </a:r>
+          </a:p>
+        </p:txBody>
+      </p:sp>
+    </p:spTree>
+  </p:cSld>
+  <p:clrMapOvr>
+    <a:masterClrMapping/>
+  </p:clrMapOvr>
+</p:sld>
+</file>
+
+<file path=ppt/slides/slide25.xml><?xml version="1.0" encoding="utf-8"?>
+<p:sld xmlns:a="http://schemas.openxmlformats.org/drawingml/2006/main" xmlns:p="http://schemas.openxmlformats.org/presentationml/2006/main" xmlns:r="http://schemas.openxmlformats.org/officeDocument/2006/relationships">
+  <p:cSld>
+    <p:bg>
+      <p:bgPr>
+        <a:solidFill>
+          <a:srgbClr val="FFFFFF"/>
+        </a:solidFill>
+        <a:effectLst/>
+      </p:bgPr>
+    </p:bg>
+    <p:spTree>
+      <p:nvGrpSpPr>
+        <p:cNvPr id="1" name=""/>
+        <p:cNvGrpSpPr/>
+        <p:nvPr/>
+      </p:nvGrpSpPr>
+      <p:grpSpPr/>
+      <p:sp>
+        <p:nvSpPr>
+          <p:cNvPr id="2" name="TextBox 1"/>
+          <p:cNvSpPr txBox="1"/>
+          <p:nvPr/>
+        </p:nvSpPr>
+        <p:spPr>
+          <a:xfrm>
+            <a:off x="548640" y="274320"/>
+            <a:ext cx="11064240" cy="822960"/>
+          </a:xfrm>
+          <a:prstGeom prst="rect">
+            <a:avLst/>
+          </a:prstGeom>
+          <a:noFill/>
+        </p:spPr>
+        <p:txBody>
+          <a:bodyPr wrap="square">
+            <a:spAutoFit/>
+          </a:bodyPr>
+          <a:lstStyle/>
+          <a:p>
+            <a:r>
+              <a:rPr sz="3000" b="1" i="0">
+                <a:solidFill>
+                  <a:srgbClr val="2B6CB0"/>
+                </a:solidFill>
+                <a:latin typeface="Calibri"/>
+              </a:rPr>
+              <a:t>Practice — answers (5-8)</a:t>
+            </a:r>
+          </a:p>
+        </p:txBody>
+      </p:sp>
+      <p:sp>
+        <p:nvSpPr>
+          <p:cNvPr id="3" name="TextBox 2"/>
+          <p:cNvSpPr txBox="1"/>
+          <p:nvPr/>
+        </p:nvSpPr>
+        <p:spPr>
+          <a:xfrm>
+            <a:off x="640080" y="1280160"/>
+            <a:ext cx="10881360" cy="5120640"/>
+          </a:xfrm>
+          <a:prstGeom prst="rect">
+            <a:avLst/>
+          </a:prstGeom>
+          <a:noFill/>
+        </p:spPr>
+        <p:txBody>
+          <a:bodyPr wrap="square">
+            <a:spAutoFit/>
+          </a:bodyPr>
+          <a:lstStyle/>
+          <a:p>
+            <a:r>
+              <a:rPr sz="2000" b="1">
+                <a:solidFill>
+                  <a:srgbClr val="222222"/>
+                </a:solidFill>
+                <a:latin typeface="Calibri"/>
+              </a:rPr>
+              <a:t>1. Describe the difference between a class and an object. (2)</a:t>
+            </a:r>
+          </a:p>
+          <a:p>
+            <a:pPr lvl="1"/>
+            <a:r>
+              <a:rPr sz="1800" i="1">
+                <a:solidFill>
+                  <a:srgbClr val="B76E00"/>
+                </a:solidFill>
+                <a:latin typeface="Calibri"/>
+              </a:rPr>
+              <a:t>Answer: A class is a template or blueprint defining attributes and methods (1); an object is a specific instance of the class created by instantiation, with its own attribute values (1).</a:t>
+            </a:r>
+          </a:p>
+          <a:p>
+            <a:r>
+              <a:rPr sz="2000" b="1">
+                <a:solidFill>
+                  <a:srgbClr val="222222"/>
+                </a:solidFill>
+                <a:latin typeface="Calibri"/>
+              </a:rPr>
+              <a:t>2. Explain how encapsulation protects the data in an object. (3)</a:t>
+            </a:r>
+          </a:p>
+          <a:p>
+            <a:pPr lvl="1"/>
+            <a:r>
+              <a:rPr sz="1800" i="1">
+                <a:solidFill>
+                  <a:srgbClr val="B76E00"/>
+                </a:solidFill>
+                <a:latin typeface="Calibri"/>
+              </a:rPr>
+              <a:t>Answer: Attributes are declared private (1) so other code cannot read or change them directly (1); access happens only through public methods, which can validate changes and keep the object in a consistent state (1).</a:t>
+            </a:r>
+          </a:p>
+          <a:p>
+            <a:r>
+              <a:rPr sz="2000" b="1">
+                <a:solidFill>
+                  <a:srgbClr val="222222"/>
+                </a:solidFill>
+                <a:latin typeface="Calibri"/>
+              </a:rPr>
+              <a:t>3. A Shape class has subclasses Circle and Square, each with its own area() method. Explain how this is an example of polymorphism. (2)</a:t>
+            </a:r>
+          </a:p>
+          <a:p>
+            <a:pPr lvl="1"/>
+            <a:r>
+              <a:rPr sz="1800" i="1">
+                <a:solidFill>
+                  <a:srgbClr val="B76E00"/>
+                </a:solidFill>
+                <a:latin typeface="Calibri"/>
+              </a:rPr>
+              <a:t>Answer: Both subclasses override the same method name, area() (1); the same call behaves differently depending on whether the object is a Circle or a Square (1).</a:t>
+            </a:r>
+          </a:p>
+          <a:p>
+            <a:r>
+              <a:rPr sz="2000" b="1">
+                <a:solidFill>
+                  <a:srgbClr val="222222"/>
+                </a:solidFill>
+                <a:latin typeface="Calibri"/>
+              </a:rPr>
+              <a:t>4. The LMC program INP, STA X, INP, ADD X, ADD X, OUT, HLT (X DAT) runs with inputs 4 then 10. State the output and justify it with a trace. (3)</a:t>
+            </a:r>
+          </a:p>
+          <a:p>
+            <a:pPr lvl="1"/>
+            <a:r>
+              <a:rPr sz="1800" i="1">
+                <a:solidFill>
+                  <a:srgbClr val="B76E00"/>
+                </a:solidFill>
+                <a:latin typeface="Calibri"/>
+              </a:rPr>
+              <a:t>Answer: Output 18 (1). Trace: accumulator 4, X = 4, accumulator overwritten with 10 (1); ADD X gives 14, ADD X gives 18, which OUT prints (1).</a:t>
+            </a:r>
+          </a:p>
+        </p:txBody>
+      </p:sp>
+    </p:spTree>
+  </p:cSld>
+  <p:clrMapOvr>
+    <a:masterClrMapping/>
+  </p:clrMapOvr>
+</p:sld>
+</file>
+
+<file path=ppt/slides/slide26.xml><?xml version="1.0" encoding="utf-8"?>
+<p:sld xmlns:a="http://schemas.openxmlformats.org/drawingml/2006/main" xmlns:p="http://schemas.openxmlformats.org/presentationml/2006/main" xmlns:r="http://schemas.openxmlformats.org/officeDocument/2006/relationships">
+  <p:cSld>
+    <p:bg>
+      <p:bgPr>
+        <a:solidFill>
+          <a:srgbClr val="FFFFFF"/>
+        </a:solidFill>
+        <a:effectLst/>
+      </p:bgPr>
+    </p:bg>
+    <p:spTree>
+      <p:nvGrpSpPr>
+        <p:cNvPr id="1" name=""/>
+        <p:cNvGrpSpPr/>
+        <p:nvPr/>
+      </p:nvGrpSpPr>
+      <p:grpSpPr/>
+      <p:sp>
+        <p:nvSpPr>
+          <p:cNvPr id="2" name="TextBox 1"/>
+          <p:cNvSpPr txBox="1"/>
+          <p:nvPr/>
+        </p:nvSpPr>
+        <p:spPr>
+          <a:xfrm>
+            <a:off x="548640" y="274320"/>
+            <a:ext cx="11064240" cy="822960"/>
+          </a:xfrm>
+          <a:prstGeom prst="rect">
+            <a:avLst/>
+          </a:prstGeom>
+          <a:noFill/>
+        </p:spPr>
+        <p:txBody>
+          <a:bodyPr wrap="square">
+            <a:spAutoFit/>
+          </a:bodyPr>
+          <a:lstStyle/>
+          <a:p>
+            <a:r>
+              <a:rPr sz="3000" b="1" i="0">
+                <a:solidFill>
+                  <a:srgbClr val="2B6CB0"/>
+                </a:solidFill>
+                <a:latin typeface="Calibri"/>
+              </a:rPr>
+              <a:t>Common misconceptions</a:t>
+            </a:r>
+          </a:p>
+        </p:txBody>
+      </p:sp>
+      <p:sp>
+        <p:nvSpPr>
+          <p:cNvPr id="3" name="TextBox 2"/>
+          <p:cNvSpPr txBox="1"/>
+          <p:nvPr/>
+        </p:nvSpPr>
+        <p:spPr>
+          <a:xfrm>
+            <a:off x="640080" y="1280160"/>
+            <a:ext cx="10881360" cy="5120640"/>
+          </a:xfrm>
+          <a:prstGeom prst="rect">
+            <a:avLst/>
+          </a:prstGeom>
+          <a:noFill/>
+        </p:spPr>
+        <p:txBody>
+          <a:bodyPr wrap="square">
+            <a:spAutoFit/>
+          </a:bodyPr>
+          <a:lstStyle/>
+          <a:p>
+            <a:pPr/>
+            <a:r>
+              <a:rPr sz="2000" b="0">
+                <a:solidFill>
+                  <a:srgbClr val="222222"/>
+                </a:solidFill>
+                <a:latin typeface="Calibri"/>
+              </a:rPr>
+              <a:t>✗ Students often think immediate and direct addressing are the same, but immediate uses the operand as the value while direct looks it up in memory.</a:t>
+            </a:r>
+          </a:p>
+          <a:p>
+            <a:pPr/>
+            <a:r>
+              <a:rPr sz="2000" b="0">
+                <a:solidFill>
+                  <a:srgbClr val="222222"/>
+                </a:solidFill>
+                <a:latin typeface="Calibri"/>
+              </a:rPr>
+              <a:t>✗ Students often think BRZ or BRP tests a mailbox, but both test only the current accumulator value.</a:t>
+            </a:r>
+          </a:p>
+          <a:p>
+            <a:pPr/>
+            <a:r>
+              <a:rPr sz="2000" b="0">
+                <a:solidFill>
+                  <a:srgbClr val="222222"/>
+                </a:solidFill>
+                <a:latin typeface="Calibri"/>
+              </a:rPr>
+              <a:t>✗ Students often forget INP and LDA overwrite the accumulator, so unsaved values are lost without an STA.</a:t>
+            </a:r>
+          </a:p>
+          <a:p>
+            <a:pPr/>
+            <a:r>
+              <a:rPr sz="2000" b="0">
+                <a:solidFill>
+                  <a:srgbClr val="222222"/>
+                </a:solidFill>
+                <a:latin typeface="Calibri"/>
+              </a:rPr>
+              <a:t>✗ Students often think encapsulation and inheritance are interchangeable, but encapsulation hides data while inheritance shares members between classes.</a:t>
+            </a:r>
+          </a:p>
+          <a:p>
+            <a:pPr/>
+            <a:r>
+              <a:rPr sz="2000" b="0">
+                <a:solidFill>
+                  <a:srgbClr val="222222"/>
+                </a:solidFill>
+                <a:latin typeface="Calibri"/>
+              </a:rPr>
+              <a:t>✗ Students often draw the inheritance arrow from parent to child, but class diagrams point the arrow from the subclass to the superclass.</a:t>
+            </a:r>
+          </a:p>
+        </p:txBody>
+      </p:sp>
+    </p:spTree>
+  </p:cSld>
+  <p:clrMapOvr>
+    <a:masterClrMapping/>
+  </p:clrMapOvr>
+</p:sld>
+</file>
+
+<file path=ppt/slides/slide27.xml><?xml version="1.0" encoding="utf-8"?>
+<p:sld xmlns:a="http://schemas.openxmlformats.org/drawingml/2006/main" xmlns:p="http://schemas.openxmlformats.org/presentationml/2006/main" xmlns:r="http://schemas.openxmlformats.org/officeDocument/2006/relationships">
+  <p:cSld>
+    <p:bg>
+      <p:bgPr>
+        <a:solidFill>
+          <a:srgbClr val="FFFFFF"/>
+        </a:solidFill>
+        <a:effectLst/>
+      </p:bgPr>
+    </p:bg>
+    <p:spTree>
+      <p:nvGrpSpPr>
+        <p:cNvPr id="1" name=""/>
+        <p:cNvGrpSpPr/>
+        <p:nvPr/>
+      </p:nvGrpSpPr>
+      <p:grpSpPr/>
+      <p:sp>
+        <p:nvSpPr>
+          <p:cNvPr id="2" name="TextBox 1"/>
+          <p:cNvSpPr txBox="1"/>
+          <p:nvPr/>
+        </p:nvSpPr>
+        <p:spPr>
+          <a:xfrm>
+            <a:off x="548640" y="274320"/>
+            <a:ext cx="11064240" cy="822960"/>
+          </a:xfrm>
+          <a:prstGeom prst="rect">
+            <a:avLst/>
+          </a:prstGeom>
+          <a:noFill/>
+        </p:spPr>
+        <p:txBody>
+          <a:bodyPr wrap="square">
+            <a:spAutoFit/>
+          </a:bodyPr>
+          <a:lstStyle/>
+          <a:p>
+            <a:r>
+              <a:rPr sz="3000" b="1" i="0">
+                <a:solidFill>
+                  <a:srgbClr val="2B6CB0"/>
+                </a:solidFill>
+                <a:latin typeface="Calibri"/>
+              </a:rPr>
+              <a:t>How the exam asks this</a:t>
+            </a:r>
+          </a:p>
+        </p:txBody>
+      </p:sp>
+      <p:sp>
+        <p:nvSpPr>
+          <p:cNvPr id="3" name="TextBox 2"/>
+          <p:cNvSpPr txBox="1"/>
+          <p:nvPr/>
+        </p:nvSpPr>
+        <p:spPr>
+          <a:xfrm>
+            <a:off x="640080" y="1280160"/>
+            <a:ext cx="10881360" cy="5120640"/>
+          </a:xfrm>
+          <a:prstGeom prst="rect">
+            <a:avLst/>
+          </a:prstGeom>
+          <a:noFill/>
+        </p:spPr>
+        <p:txBody>
+          <a:bodyPr wrap="square">
+            <a:spAutoFit/>
+          </a:bodyPr>
+          <a:lstStyle/>
+          <a:p>
+            <a:pPr/>
+            <a:r>
+              <a:rPr sz="2000" b="0">
+                <a:solidFill>
+                  <a:srgbClr val="222222"/>
+                </a:solidFill>
+                <a:latin typeface="Calibri"/>
+              </a:rPr>
+              <a:t>Command words: state for instruction meanings, 1 to 2 marks; write for LMC programs, 3 to 5 marks; explain for paradigms and OOP concepts, 2 to 4 marks.</a:t>
+            </a:r>
+          </a:p>
+          <a:p>
+            <a:pPr/>
+            <a:r>
+              <a:rPr sz="2000" b="0">
+                <a:solidFill>
+                  <a:srgbClr val="222222"/>
+                </a:solidFill>
+                <a:latin typeface="Calibri"/>
+              </a:rPr>
+              <a:t>Addressing mode questions give a memory table and one operand and expect the value under each mode with working, usually 4 marks.</a:t>
+            </a:r>
+          </a:p>
+          <a:p>
+            <a:pPr/>
+            <a:r>
+              <a:rPr sz="2000" b="0">
+                <a:solidFill>
+                  <a:srgbClr val="222222"/>
+                </a:solidFill>
+                <a:latin typeface="Calibri"/>
+              </a:rPr>
+              <a:t>OOP questions often supply a class diagram or short pseudocode and ask you to identify or apply inheritance, encapsulation or polymorphism.</a:t>
+            </a:r>
+          </a:p>
+          <a:p>
+            <a:pPr/>
+            <a:r>
+              <a:rPr sz="2000" b="0">
+                <a:solidFill>
+                  <a:srgbClr val="222222"/>
+                </a:solidFill>
+                <a:latin typeface="Calibri"/>
+              </a:rPr>
+              <a:t>Example stem: Write a Little Man Computer program that takes in two numbers and outputs the total. (4)</a:t>
+            </a:r>
+          </a:p>
+        </p:txBody>
+      </p:sp>
+    </p:spTree>
+  </p:cSld>
+  <p:clrMapOvr>
+    <a:masterClrMapping/>
+  </p:clrMapOvr>
+</p:sld>
+</file>
+
+<file path=ppt/slides/slide28.xml><?xml version="1.0" encoding="utf-8"?>
+<p:sld xmlns:a="http://schemas.openxmlformats.org/drawingml/2006/main" xmlns:p="http://schemas.openxmlformats.org/presentationml/2006/main" xmlns:r="http://schemas.openxmlformats.org/officeDocument/2006/relationships">
+  <p:cSld>
+    <p:bg>
+      <p:bgPr>
+        <a:solidFill>
+          <a:srgbClr val="FFFFFF"/>
+        </a:solidFill>
+        <a:effectLst/>
+      </p:bgPr>
+    </p:bg>
+    <p:spTree>
+      <p:nvGrpSpPr>
+        <p:cNvPr id="1" name=""/>
+        <p:cNvGrpSpPr/>
+        <p:nvPr/>
+      </p:nvGrpSpPr>
+      <p:grpSpPr/>
+      <p:sp>
+        <p:nvSpPr>
+          <p:cNvPr id="2" name="TextBox 1"/>
+          <p:cNvSpPr txBox="1"/>
+          <p:nvPr/>
+        </p:nvSpPr>
+        <p:spPr>
+          <a:xfrm>
+            <a:off x="548640" y="274320"/>
+            <a:ext cx="11064240" cy="822960"/>
+          </a:xfrm>
+          <a:prstGeom prst="rect">
+            <a:avLst/>
+          </a:prstGeom>
+          <a:noFill/>
+        </p:spPr>
+        <p:txBody>
+          <a:bodyPr wrap="square">
+            <a:spAutoFit/>
+          </a:bodyPr>
+          <a:lstStyle/>
+          <a:p>
+            <a:r>
+              <a:rPr sz="3000" b="1" i="0">
+                <a:solidFill>
+                  <a:srgbClr val="2B6CB0"/>
+                </a:solidFill>
+                <a:latin typeface="Calibri"/>
+              </a:rPr>
+              <a:t>Your turn</a:t>
+            </a:r>
+          </a:p>
+        </p:txBody>
+      </p:sp>
+      <p:sp>
+        <p:nvSpPr>
+          <p:cNvPr id="3" name="TextBox 2"/>
+          <p:cNvSpPr txBox="1"/>
+          <p:nvPr/>
+        </p:nvSpPr>
+        <p:spPr>
+          <a:xfrm>
+            <a:off x="640080" y="1280160"/>
+            <a:ext cx="10881360" cy="5120640"/>
+          </a:xfrm>
+          <a:prstGeom prst="rect">
+            <a:avLst/>
+          </a:prstGeom>
+          <a:noFill/>
+        </p:spPr>
+        <p:txBody>
+          <a:bodyPr wrap="square">
+            <a:spAutoFit/>
+          </a:bodyPr>
+          <a:lstStyle/>
+          <a:p>
+            <a:pPr/>
+            <a:r>
+              <a:rPr sz="2400" b="1">
+                <a:solidFill>
+                  <a:srgbClr val="2B6CB0"/>
+                </a:solidFill>
+                <a:latin typeface="Calibri"/>
+              </a:rPr>
+              <a:t>Task</a:t>
+            </a:r>
+          </a:p>
+          <a:p>
+            <a:pPr lvl="1"/>
+            <a:r>
+              <a:rPr sz="2200" b="0">
+                <a:solidFill>
+                  <a:srgbClr val="222222"/>
+                </a:solidFill>
+                <a:latin typeface="Calibri"/>
+              </a:rPr>
+              <a:t>Write an LMC program that inputs a number and outputs double the number, then produce a full instruction-by-instruction trace table for input 6, showing the accumulator after every instruction.</a:t>
+            </a:r>
+          </a:p>
+          <a:p>
+            <a:r>
+              <a:rPr sz="2400" b="1">
+                <a:solidFill>
+                  <a:srgbClr val="B76E00"/>
+                </a:solidFill>
+                <a:latin typeface="Calibri"/>
+              </a:rPr>
+              <a:t>Challenge / stretch</a:t>
+            </a:r>
+          </a:p>
+          <a:p>
+            <a:pPr lvl="1"/>
+            <a:r>
+              <a:rPr sz="2200" b="0">
+                <a:solidFill>
+                  <a:srgbClr val="222222"/>
+                </a:solidFill>
+                <a:latin typeface="Calibri"/>
+              </a:rPr>
+              <a:t>Write an LMC program that inputs two numbers and outputs the larger one, using SUB and BRP to compare them; trace it with inputs 3, 8 and then 8, 3 to prove both paths work, then explain which addressing mode a version storing ten inputs in consecutive mailboxes would need.</a:t>
+            </a:r>
+          </a:p>
+        </p:txBody>
+      </p:sp>
+    </p:spTree>
+  </p:cSld>
+  <p:clrMapOvr>
+    <a:masterClrMapping/>
+  </p:clrMapOvr>
+</p:sld>
+</file>
+
+<file path=ppt/slides/slide29.xml><?xml version="1.0" encoding="utf-8"?>
+<p:sld xmlns:a="http://schemas.openxmlformats.org/drawingml/2006/main" xmlns:p="http://schemas.openxmlformats.org/presentationml/2006/main" xmlns:r="http://schemas.openxmlformats.org/officeDocument/2006/relationships">
+  <p:cSld>
+    <p:bg>
+      <p:bgPr>
+        <a:solidFill>
+          <a:srgbClr val="FFFFFF"/>
+        </a:solidFill>
+        <a:effectLst/>
+      </p:bgPr>
+    </p:bg>
+    <p:spTree>
+      <p:nvGrpSpPr>
+        <p:cNvPr id="1" name=""/>
+        <p:cNvGrpSpPr/>
+        <p:nvPr/>
+      </p:nvGrpSpPr>
+      <p:grpSpPr/>
+      <p:sp>
+        <p:nvSpPr>
+          <p:cNvPr id="2" name="TextBox 1"/>
+          <p:cNvSpPr txBox="1"/>
+          <p:nvPr/>
+        </p:nvSpPr>
+        <p:spPr>
+          <a:xfrm>
+            <a:off x="548640" y="274320"/>
+            <a:ext cx="11064240" cy="822960"/>
+          </a:xfrm>
+          <a:prstGeom prst="rect">
+            <a:avLst/>
+          </a:prstGeom>
+          <a:noFill/>
+        </p:spPr>
+        <p:txBody>
+          <a:bodyPr wrap="square">
+            <a:spAutoFit/>
+          </a:bodyPr>
+          <a:lstStyle/>
+          <a:p>
+            <a:r>
+              <a:rPr sz="3000" b="1" i="0">
+                <a:solidFill>
+                  <a:srgbClr val="2B6CB0"/>
+                </a:solidFill>
+                <a:latin typeface="Calibri"/>
+              </a:rPr>
+              <a:t>Exit ticket</a:t>
+            </a:r>
+          </a:p>
+        </p:txBody>
+      </p:sp>
+      <p:sp>
+        <p:nvSpPr>
+          <p:cNvPr id="3" name="TextBox 2"/>
+          <p:cNvSpPr txBox="1"/>
+          <p:nvPr/>
+        </p:nvSpPr>
+        <p:spPr>
+          <a:xfrm>
+            <a:off x="640080" y="1280160"/>
+            <a:ext cx="10881360" cy="5120640"/>
+          </a:xfrm>
+          <a:prstGeom prst="rect">
+            <a:avLst/>
+          </a:prstGeom>
+          <a:noFill/>
+        </p:spPr>
+        <p:txBody>
+          <a:bodyPr wrap="square">
+            <a:spAutoFit/>
+          </a:bodyPr>
+          <a:lstStyle/>
+          <a:p>
+            <a:r>
+              <a:rPr sz="2200" b="1">
+                <a:solidFill>
+                  <a:srgbClr val="222222"/>
+                </a:solidFill>
+                <a:latin typeface="Calibri"/>
+              </a:rPr>
+              <a:t>1. The accumulator holds 7 and mailbox N holds 2. What does the accumulator hold after SUB N, and is BRP then taken?</a:t>
+            </a:r>
+          </a:p>
+          <a:p>
+            <a:r>
+              <a:rPr sz="2200" b="1">
+                <a:solidFill>
+                  <a:srgbClr val="222222"/>
+                </a:solidFill>
+                <a:latin typeface="Calibri"/>
+              </a:rPr>
+              <a:t>2. Under indirect addressing, operand 12 points to address 12 which holds 30, and address 30 holds 8. What value is used?</a:t>
+            </a:r>
+          </a:p>
+          <a:p>
+            <a:r>
+              <a:rPr sz="2200" b="1">
+                <a:solidFill>
+                  <a:srgbClr val="222222"/>
+                </a:solidFill>
+                <a:latin typeface="Calibri"/>
+              </a:rPr>
+              <a:t>3. Name the OOP feature: a subclass provides its own version of a method it acquired from its superclass.</a:t>
             </a:r>
           </a:p>
         </p:txBody>
@@ -3972,7 +6732,7 @@
                 </a:solidFill>
                 <a:latin typeface="Calibri"/>
               </a:rPr>
-              <a:t>1. What is the difference between a compiler and an interpreter?</a:t>
+              <a:t>1. Which stage of compilation builds the parse tree and reports a missing bracket?</a:t>
             </a:r>
           </a:p>
           <a:p>
@@ -3983,7 +6743,7 @@
                 </a:solidFill>
                 <a:latin typeface="Calibri"/>
               </a:rPr>
-              <a:t>2. Which methodology suits a project with unclear, changing requirements?</a:t>
+              <a:t>2. How do a compiler and an interpreter differ in reporting errors?</a:t>
             </a:r>
           </a:p>
           <a:p>
@@ -3994,7 +6754,7 @@
                 </a:solidFill>
                 <a:latin typeface="Calibri"/>
               </a:rPr>
-              <a:t>3. What is a programming paradigm?</a:t>
+              <a:t>3. Name the three categories of test data and what the program should do with each.</a:t>
             </a:r>
           </a:p>
           <a:p>
@@ -4005,7 +6765,7 @@
                 </a:solidFill>
                 <a:latin typeface="Calibri"/>
               </a:rPr>
-              <a:t>4. What does the LMC instruction BRZ xx do?</a:t>
+              <a:t>4. What is the defining feature of the Agile methodology?</a:t>
             </a:r>
           </a:p>
           <a:p>
@@ -4016,7 +6776,159 @@
                 </a:solidFill>
                 <a:latin typeface="Calibri"/>
               </a:rPr>
-              <a:t>5. In immediate addressing, what does the operand hold?</a:t>
+              <a:t>5. What fixes the order of two steps when you decompose a problem?</a:t>
+            </a:r>
+          </a:p>
+        </p:txBody>
+      </p:sp>
+    </p:spTree>
+  </p:cSld>
+  <p:clrMapOvr>
+    <a:masterClrMapping/>
+  </p:clrMapOvr>
+</p:sld>
+</file>
+
+<file path=ppt/slides/slide30.xml><?xml version="1.0" encoding="utf-8"?>
+<p:sld xmlns:a="http://schemas.openxmlformats.org/drawingml/2006/main" xmlns:p="http://schemas.openxmlformats.org/presentationml/2006/main" xmlns:r="http://schemas.openxmlformats.org/officeDocument/2006/relationships">
+  <p:cSld>
+    <p:bg>
+      <p:bgPr>
+        <a:solidFill>
+          <a:srgbClr val="FFFFFF"/>
+        </a:solidFill>
+        <a:effectLst/>
+      </p:bgPr>
+    </p:bg>
+    <p:spTree>
+      <p:nvGrpSpPr>
+        <p:cNvPr id="1" name=""/>
+        <p:cNvGrpSpPr/>
+        <p:nvPr/>
+      </p:nvGrpSpPr>
+      <p:grpSpPr/>
+      <p:sp>
+        <p:nvSpPr>
+          <p:cNvPr id="2" name="TextBox 1"/>
+          <p:cNvSpPr txBox="1"/>
+          <p:nvPr/>
+        </p:nvSpPr>
+        <p:spPr>
+          <a:xfrm>
+            <a:off x="548640" y="274320"/>
+            <a:ext cx="11064240" cy="822960"/>
+          </a:xfrm>
+          <a:prstGeom prst="rect">
+            <a:avLst/>
+          </a:prstGeom>
+          <a:noFill/>
+        </p:spPr>
+        <p:txBody>
+          <a:bodyPr wrap="square">
+            <a:spAutoFit/>
+          </a:bodyPr>
+          <a:lstStyle/>
+          <a:p>
+            <a:r>
+              <a:rPr sz="3000" b="1" i="0">
+                <a:solidFill>
+                  <a:srgbClr val="2B6CB0"/>
+                </a:solidFill>
+                <a:latin typeface="Calibri"/>
+              </a:rPr>
+              <a:t>Exit ticket — answers</a:t>
+            </a:r>
+          </a:p>
+        </p:txBody>
+      </p:sp>
+      <p:sp>
+        <p:nvSpPr>
+          <p:cNvPr id="3" name="TextBox 2"/>
+          <p:cNvSpPr txBox="1"/>
+          <p:nvPr/>
+        </p:nvSpPr>
+        <p:spPr>
+          <a:xfrm>
+            <a:off x="640080" y="1280160"/>
+            <a:ext cx="10881360" cy="5120640"/>
+          </a:xfrm>
+          <a:prstGeom prst="rect">
+            <a:avLst/>
+          </a:prstGeom>
+          <a:noFill/>
+        </p:spPr>
+        <p:txBody>
+          <a:bodyPr wrap="square">
+            <a:spAutoFit/>
+          </a:bodyPr>
+          <a:lstStyle/>
+          <a:p>
+            <a:r>
+              <a:rPr sz="2200" b="1">
+                <a:solidFill>
+                  <a:srgbClr val="222222"/>
+                </a:solidFill>
+                <a:latin typeface="Calibri"/>
+              </a:rPr>
+              <a:t>1. The accumulator holds 7 and mailbox N holds 2. What does the accumulator hold after SUB N, and is BRP then taken?</a:t>
+            </a:r>
+          </a:p>
+          <a:p>
+            <a:pPr lvl="1"/>
+            <a:r>
+              <a:rPr sz="1800" i="1">
+                <a:solidFill>
+                  <a:srgbClr val="B76E00"/>
+                </a:solidFill>
+                <a:latin typeface="Calibri"/>
+              </a:rPr>
+              <a:t>Answer: 5; yes, BRP is taken because 5 is positive.</a:t>
+            </a:r>
+          </a:p>
+          <a:p>
+            <a:r>
+              <a:rPr sz="2200" b="1">
+                <a:solidFill>
+                  <a:srgbClr val="222222"/>
+                </a:solidFill>
+                <a:latin typeface="Calibri"/>
+              </a:rPr>
+              <a:t>2. Under indirect addressing, operand 12 points to address 12 which holds 30, and address 30 holds 8. What value is used?</a:t>
+            </a:r>
+          </a:p>
+          <a:p>
+            <a:pPr lvl="1"/>
+            <a:r>
+              <a:rPr sz="1800" i="1">
+                <a:solidFill>
+                  <a:srgbClr val="B76E00"/>
+                </a:solidFill>
+                <a:latin typeface="Calibri"/>
+              </a:rPr>
+              <a:t>Answer: 8: address 12 gives 30, and the value at address 30 is 8, two lookups.</a:t>
+            </a:r>
+          </a:p>
+          <a:p>
+            <a:r>
+              <a:rPr sz="2200" b="1">
+                <a:solidFill>
+                  <a:srgbClr val="222222"/>
+                </a:solidFill>
+                <a:latin typeface="Calibri"/>
+              </a:rPr>
+              <a:t>3. Name the OOP feature: a subclass provides its own version of a method it acquired from its superclass.</a:t>
+            </a:r>
+          </a:p>
+          <a:p>
+            <a:pPr lvl="1"/>
+            <a:r>
+              <a:rPr sz="1800" i="1">
+                <a:solidFill>
+                  <a:srgbClr val="B76E00"/>
+                </a:solidFill>
+                <a:latin typeface="Calibri"/>
+              </a:rPr>
+              <a:t>Answer: Overriding, which enables polymorphism; the acquisition itself is inheritance.</a:t>
             </a:r>
           </a:p>
         </p:txBody>
@@ -4110,7 +7022,7 @@
                 </a:solidFill>
                 <a:latin typeface="Calibri"/>
               </a:rPr>
-              <a:t>1. What is the difference between a compiler and an interpreter?</a:t>
+              <a:t>1. Which stage of compilation builds the parse tree and reports a missing bracket?</a:t>
             </a:r>
           </a:p>
           <a:p>
@@ -4122,7 +7034,7 @@
                 </a:solidFill>
                 <a:latin typeface="Calibri"/>
               </a:rPr>
-              <a:t>Answer: A compiler translates all at once into a standalone executable; an interpreter translates and executes line by line at run time (interleaving 1.2.2).</a:t>
+              <a:t>Answer: Syntax analysis: tokens are checked against the grammar rules and syntax errors are reported (1.2.2).</a:t>
             </a:r>
           </a:p>
           <a:p>
@@ -4133,7 +7045,7 @@
                 </a:solidFill>
                 <a:latin typeface="Calibri"/>
               </a:rPr>
-              <a:t>2. Which methodology suits a project with unclear, changing requirements?</a:t>
+              <a:t>2. How do a compiler and an interpreter differ in reporting errors?</a:t>
             </a:r>
           </a:p>
           <a:p>
@@ -4145,7 +7057,7 @@
                 </a:solidFill>
                 <a:latin typeface="Calibri"/>
               </a:rPr>
-              <a:t>Answer: Agile, because it works in iterative increments with continuous client feedback (interleaving 1.2.3).</a:t>
+              <a:t>Answer: A compiler reports all errors in a list at the end of translation; an interpreter stops at the first error it reaches (1.2.2).</a:t>
             </a:r>
           </a:p>
           <a:p>
@@ -4156,7 +7068,7 @@
                 </a:solidFill>
                 <a:latin typeface="Calibri"/>
               </a:rPr>
-              <a:t>3. What is a programming paradigm?</a:t>
+              <a:t>3. Name the three categories of test data and what the program should do with each.</a:t>
             </a:r>
           </a:p>
           <a:p>
@@ -4168,7 +7080,7 @@
                 </a:solidFill>
                 <a:latin typeface="Calibri"/>
               </a:rPr>
-              <a:t>Answer: A style or approach to writing programs, chosen to make a problem easier to write, maintain or reuse.</a:t>
+              <a:t>Answer: Normal, accepted; boundary, the exact range edges, accepted; erroneous, out of range, rejected gracefully (1.2.3).</a:t>
             </a:r>
           </a:p>
           <a:p>
@@ -4179,7 +7091,7 @@
                 </a:solidFill>
                 <a:latin typeface="Calibri"/>
               </a:rPr>
-              <a:t>4. What does the LMC instruction BRZ xx do?</a:t>
+              <a:t>4. What is the defining feature of the Agile methodology?</a:t>
             </a:r>
           </a:p>
           <a:p>
@@ -4191,7 +7103,7 @@
                 </a:solidFill>
                 <a:latin typeface="Calibri"/>
               </a:rPr>
-              <a:t>Answer: It branches to address xx only if the Accumulator equals zero.</a:t>
+              <a:t>Answer: Iterative increments with continuous client feedback so changing requirements are absorbed (1.2.3).</a:t>
             </a:r>
           </a:p>
           <a:p>
@@ -4202,7 +7114,7 @@
                 </a:solidFill>
                 <a:latin typeface="Calibri"/>
               </a:rPr>
-              <a:t>5. In immediate addressing, what does the operand hold?</a:t>
+              <a:t>5. What fixes the order of two steps when you decompose a problem?</a:t>
             </a:r>
           </a:p>
           <a:p>
@@ -4214,7 +7126,7 @@
                 </a:solidFill>
                 <a:latin typeface="Calibri"/>
               </a:rPr>
-              <a:t>Answer: The actual value to be used.</a:t>
+              <a:t>Answer: A data dependency: a step that consumes the output of an earlier step must run after it (2.1.3).</a:t>
             </a:r>
           </a:p>
         </p:txBody>
@@ -4309,7 +7221,7 @@
                 </a:solidFill>
                 <a:latin typeface="Calibri"/>
               </a:rPr>
-              <a:t>Programming paradigm</a:t>
+              <a:t>Paradigm</a:t>
             </a:r>
             <a:r>
               <a:rPr sz="1800">
@@ -4318,7 +7230,7 @@
                 </a:solidFill>
                 <a:latin typeface="Calibri"/>
               </a:rPr>
-              <a:t> — A style or approach to writing programs, picked to suit a problem.</a:t>
+              <a:t> — A style or approach to writing programs; chosen to make a problem easier to solve and maintain.</a:t>
             </a:r>
           </a:p>
           <a:p>
@@ -4329,7 +7241,7 @@
                 </a:solidFill>
                 <a:latin typeface="Calibri"/>
               </a:rPr>
-              <a:t>Procedural</a:t>
+              <a:t>Assembly language</a:t>
             </a:r>
             <a:r>
               <a:rPr sz="1800">
@@ -4338,7 +7250,7 @@
                 </a:solidFill>
                 <a:latin typeface="Calibri"/>
               </a:rPr>
-              <a:t> — A paradigm using sequence, selection and iteration organised into procedures/subroutines, specifying how.</a:t>
+              <a:t> — A low-level, processor-specific language using mnemonics, roughly one per machine instruction.</a:t>
             </a:r>
           </a:p>
           <a:p>
@@ -4349,7 +7261,7 @@
                 </a:solidFill>
                 <a:latin typeface="Calibri"/>
               </a:rPr>
-              <a:t>Assembly language</a:t>
+              <a:t>Immediate addressing</a:t>
             </a:r>
             <a:r>
               <a:rPr sz="1800">
@@ -4358,7 +7270,7 @@
                 </a:solidFill>
                 <a:latin typeface="Calibri"/>
               </a:rPr>
-              <a:t> — A low-level language using mnemonics, roughly one mnemonic per machine instruction, processor-specific.</a:t>
+              <a:t> — The operand itself is the value to be used, with no memory lookup.</a:t>
             </a:r>
           </a:p>
           <a:p>
@@ -4369,7 +7281,7 @@
                 </a:solidFill>
                 <a:latin typeface="Calibri"/>
               </a:rPr>
-              <a:t>Immediate addressing</a:t>
+              <a:t>Indirect addressing</a:t>
             </a:r>
             <a:r>
               <a:rPr sz="1800">
@@ -4378,7 +7290,7 @@
                 </a:solidFill>
                 <a:latin typeface="Calibri"/>
               </a:rPr>
-              <a:t> — The operand is the actual value to be used.</a:t>
+              <a:t> — The operand is the address of a location that holds the address of the value.</a:t>
             </a:r>
           </a:p>
           <a:p>
@@ -4389,7 +7301,7 @@
                 </a:solidFill>
                 <a:latin typeface="Calibri"/>
               </a:rPr>
-              <a:t>Direct addressing</a:t>
+              <a:t>Class</a:t>
             </a:r>
             <a:r>
               <a:rPr sz="1800">
@@ -4398,7 +7310,7 @@
                 </a:solidFill>
                 <a:latin typeface="Calibri"/>
               </a:rPr>
-              <a:t> — The operand is the address that holds the value.</a:t>
+              <a:t> — A template or blueprint defining the attributes and methods of a type of object.</a:t>
             </a:r>
           </a:p>
           <a:p>
@@ -4409,7 +7321,7 @@
                 </a:solidFill>
                 <a:latin typeface="Calibri"/>
               </a:rPr>
-              <a:t>Indirect addressing</a:t>
+              <a:t>Object</a:t>
             </a:r>
             <a:r>
               <a:rPr sz="1800">
@@ -4418,7 +7330,7 @@
                 </a:solidFill>
                 <a:latin typeface="Calibri"/>
               </a:rPr>
-              <a:t> — The operand is the address of a location that holds the address of the value (a pointer).</a:t>
+              <a:t> — A specific instance of a class, created by instantiation, with its own attribute values.</a:t>
             </a:r>
           </a:p>
           <a:p>
@@ -4429,6 +7341,26 @@
                 </a:solidFill>
                 <a:latin typeface="Calibri"/>
               </a:rPr>
+              <a:t>Encapsulation</a:t>
+            </a:r>
+            <a:r>
+              <a:rPr sz="1800">
+                <a:solidFill>
+                  <a:srgbClr val="222222"/>
+                </a:solidFill>
+                <a:latin typeface="Calibri"/>
+              </a:rPr>
+              <a:t> — Bundling data with its methods and making attributes private, accessible only through public methods.</a:t>
+            </a:r>
+          </a:p>
+          <a:p>
+            <a:r>
+              <a:rPr b="1" sz="2000">
+                <a:solidFill>
+                  <a:srgbClr val="1A365D"/>
+                </a:solidFill>
+                <a:latin typeface="Calibri"/>
+              </a:rPr>
               <a:t>Inheritance</a:t>
             </a:r>
             <a:r>
@@ -4438,7 +7370,7 @@
                 </a:solidFill>
                 <a:latin typeface="Calibri"/>
               </a:rPr>
-              <a:t> — A subclass acquiring the attributes and methods of a superclass, which it can extend or override.</a:t>
+              <a:t> — A subclass acquiring the attributes and methods of a superclass, then adding or overriding them.</a:t>
             </a:r>
           </a:p>
           <a:p>
@@ -4458,7 +7390,7 @@
                 </a:solidFill>
                 <a:latin typeface="Calibri"/>
               </a:rPr>
-              <a:t> — The same method name behaving differently depending on the object, typically via overriding.</a:t>
+              <a:t> — The same method name behaving differently depending on the object it is called on.</a:t>
             </a:r>
           </a:p>
         </p:txBody>
@@ -4518,7 +7450,7 @@
                 </a:solidFill>
                 <a:latin typeface="Calibri"/>
               </a:rPr>
-              <a:t>Paradigms and procedural code</a:t>
+              <a:t>Why paradigms exist</a:t>
             </a:r>
           </a:p>
         </p:txBody>
@@ -4547,49 +7479,61 @@
           <a:p>
             <a:pPr/>
             <a:r>
-              <a:rPr sz="2200" b="0">
-                <a:solidFill>
-                  <a:srgbClr val="222222"/>
-                </a:solidFill>
-                <a:latin typeface="Calibri"/>
-              </a:rPr>
-              <a:t>A programming paradigm is a style or approach to writing a program; no one language suits every task.</a:t>
+              <a:rPr sz="2000" b="0">
+                <a:solidFill>
+                  <a:srgbClr val="222222"/>
+                </a:solidFill>
+                <a:latin typeface="Calibri"/>
+              </a:rPr>
+              <a:t>A paradigm is a style or approach to writing programs.</a:t>
             </a:r>
           </a:p>
           <a:p>
             <a:pPr/>
             <a:r>
-              <a:rPr sz="2200" b="0">
-                <a:solidFill>
-                  <a:srgbClr val="222222"/>
-                </a:solidFill>
-                <a:latin typeface="Calibri"/>
-              </a:rPr>
-              <a:t>Pick the paradigm that makes a problem easier to write, maintain or reuse.</a:t>
+              <a:rPr sz="2000" b="0">
+                <a:solidFill>
+                  <a:srgbClr val="222222"/>
+                </a:solidFill>
+                <a:latin typeface="Calibri"/>
+              </a:rPr>
+              <a:t>No single style suits every task, so languages are built around different paradigms.</a:t>
             </a:r>
           </a:p>
           <a:p>
             <a:pPr/>
             <a:r>
-              <a:rPr sz="2200" b="0">
-                <a:solidFill>
-                  <a:srgbClr val="222222"/>
-                </a:solidFill>
-                <a:latin typeface="Calibri"/>
-              </a:rPr>
-              <a:t>Procedural code uses sequence, selection and iteration organised into procedures/subroutines and specifies how (Python, C, Pascal).</a:t>
+              <a:rPr sz="2000" b="0">
+                <a:solidFill>
+                  <a:srgbClr val="222222"/>
+                </a:solidFill>
+                <a:latin typeface="Calibri"/>
+              </a:rPr>
+              <a:t>Procedural code states how to solve a problem step by step.</a:t>
             </a:r>
           </a:p>
           <a:p>
             <a:pPr/>
             <a:r>
-              <a:rPr sz="2200" b="0">
-                <a:solidFill>
-                  <a:srgbClr val="222222"/>
-                </a:solidFill>
-                <a:latin typeface="Calibri"/>
-              </a:rPr>
-              <a:t>It contrasts with object-oriented code, which models the problem as interacting objects.</a:t>
+              <a:rPr sz="2000" b="0">
+                <a:solidFill>
+                  <a:srgbClr val="222222"/>
+                </a:solidFill>
+                <a:latin typeface="Calibri"/>
+              </a:rPr>
+              <a:t>Object-oriented code models the problem as interacting objects.</a:t>
+            </a:r>
+          </a:p>
+          <a:p>
+            <a:pPr/>
+            <a:r>
+              <a:rPr sz="2000" b="0">
+                <a:solidFill>
+                  <a:srgbClr val="222222"/>
+                </a:solidFill>
+                <a:latin typeface="Calibri"/>
+              </a:rPr>
+              <a:t>Low-level languages trade readability for direct control of the hardware.</a:t>
             </a:r>
           </a:p>
         </p:txBody>
@@ -4649,7 +7593,7 @@
                 </a:solidFill>
                 <a:latin typeface="Calibri"/>
               </a:rPr>
-              <a:t>Assembly and the LMC</a:t>
+              <a:t>Procedural programming</a:t>
             </a:r>
           </a:p>
         </p:txBody>
@@ -4678,49 +7622,49 @@
           <a:p>
             <a:pPr/>
             <a:r>
-              <a:rPr sz="2200" b="0">
-                <a:solidFill>
-                  <a:srgbClr val="222222"/>
-                </a:solidFill>
-                <a:latin typeface="Calibri"/>
-              </a:rPr>
-              <a:t>Assembly is low-level, using mnemonics such as ADD and STA, roughly one mnemonic per machine instruction and processor-specific.</a:t>
+              <a:rPr sz="2000" b="0">
+                <a:solidFill>
+                  <a:srgbClr val="222222"/>
+                </a:solidFill>
+                <a:latin typeface="Calibri"/>
+              </a:rPr>
+              <a:t>Built from sequence, selection and iteration, organised into procedures and functions.</a:t>
             </a:r>
           </a:p>
           <a:p>
             <a:pPr/>
             <a:r>
-              <a:rPr sz="2200" b="0">
-                <a:solidFill>
-                  <a:srgbClr val="222222"/>
-                </a:solidFill>
-                <a:latin typeface="Calibri"/>
-              </a:rPr>
-              <a:t>It is used where speed, small size or direct hardware control matter, e.g. drivers and embedded systems.</a:t>
+              <a:rPr sz="2000" b="0">
+                <a:solidFill>
+                  <a:srgbClr val="222222"/>
+                </a:solidFill>
+                <a:latin typeface="Calibri"/>
+              </a:rPr>
+              <a:t>The program is an ordered set of instructions operating on data.</a:t>
             </a:r>
           </a:p>
           <a:p>
             <a:pPr/>
             <a:r>
-              <a:rPr sz="2200" b="0">
-                <a:solidFill>
-                  <a:srgbClr val="222222"/>
-                </a:solidFill>
-                <a:latin typeface="Calibri"/>
-              </a:rPr>
-              <a:t>The Little Man Computer is a simple model CPU and instruction set for learning assembly and the FDE cycle.</a:t>
+              <a:rPr sz="2000" b="0">
+                <a:solidFill>
+                  <a:srgbClr val="222222"/>
+                </a:solidFill>
+                <a:latin typeface="Calibri"/>
+              </a:rPr>
+              <a:t>Suits problems that decompose naturally into a series of steps.</a:t>
             </a:r>
           </a:p>
           <a:p>
             <a:pPr/>
             <a:r>
-              <a:rPr sz="2200" b="0">
-                <a:solidFill>
-                  <a:srgbClr val="222222"/>
-                </a:solidFill>
-                <a:latin typeface="Calibri"/>
-              </a:rPr>
-              <a:t>Key LMC instructions: INP, OUT, STA, LDA, ADD, SUB, BRA (jump), BRZ (branch if zero), BRP (branch if &gt;= 0), DAT, HLT.</a:t>
+              <a:rPr sz="2000" b="0">
+                <a:solidFill>
+                  <a:srgbClr val="222222"/>
+                </a:solidFill>
+                <a:latin typeface="Calibri"/>
+              </a:rPr>
+              <a:t>Examples include Python, C and Pascal used in a procedural style.</a:t>
             </a:r>
           </a:p>
         </p:txBody>
@@ -4780,7 +7724,7 @@
                 </a:solidFill>
                 <a:latin typeface="Calibri"/>
               </a:rPr>
-              <a:t>Addressing modes</a:t>
+              <a:t>Assembly language</a:t>
             </a:r>
           </a:p>
         </p:txBody>
@@ -4809,49 +7753,61 @@
           <a:p>
             <a:pPr/>
             <a:r>
-              <a:rPr sz="2200" b="0">
-                <a:solidFill>
-                  <a:srgbClr val="222222"/>
-                </a:solidFill>
-                <a:latin typeface="Calibri"/>
-              </a:rPr>
-              <a:t>Immediate: the operand is the actual value.</a:t>
+              <a:rPr sz="2000" b="0">
+                <a:solidFill>
+                  <a:srgbClr val="222222"/>
+                </a:solidFill>
+                <a:latin typeface="Calibri"/>
+              </a:rPr>
+              <a:t>A low-level language using mnemonics such as ADD and STA.</a:t>
             </a:r>
           </a:p>
           <a:p>
             <a:pPr/>
             <a:r>
-              <a:rPr sz="2200" b="0">
-                <a:solidFill>
-                  <a:srgbClr val="222222"/>
-                </a:solidFill>
-                <a:latin typeface="Calibri"/>
-              </a:rPr>
-              <a:t>Direct: the operand is the address holding the value.</a:t>
+              <a:rPr sz="2000" b="0">
+                <a:solidFill>
+                  <a:srgbClr val="222222"/>
+                </a:solidFill>
+                <a:latin typeface="Calibri"/>
+              </a:rPr>
+              <a:t>Each mnemonic corresponds to roughly one machine code instruction.</a:t>
             </a:r>
           </a:p>
           <a:p>
             <a:pPr/>
             <a:r>
-              <a:rPr sz="2200" b="0">
-                <a:solidFill>
-                  <a:srgbClr val="222222"/>
-                </a:solidFill>
-                <a:latin typeface="Calibri"/>
-              </a:rPr>
-              <a:t>Indirect: the operand is the address of a location holding the address of the value (used for pointers).</a:t>
+              <a:rPr sz="2000" b="0">
+                <a:solidFill>
+                  <a:srgbClr val="222222"/>
+                </a:solidFill>
+                <a:latin typeface="Calibri"/>
+              </a:rPr>
+              <a:t>It is processor-specific: code written for one architecture will not run on another.</a:t>
             </a:r>
           </a:p>
           <a:p>
             <a:pPr/>
             <a:r>
-              <a:rPr sz="2200" b="0">
-                <a:solidFill>
-                  <a:srgbClr val="222222"/>
-                </a:solidFill>
-                <a:latin typeface="Calibri"/>
-              </a:rPr>
-              <a:t>Indexed: the effective address is a base address plus the contents of an index register (used for arrays).</a:t>
+              <a:rPr sz="2000" b="0">
+                <a:solidFill>
+                  <a:srgbClr val="222222"/>
+                </a:solidFill>
+                <a:latin typeface="Calibri"/>
+              </a:rPr>
+              <a:t>Chosen for speed, small size or direct hardware control: device drivers and embedded systems.</a:t>
+            </a:r>
+          </a:p>
+          <a:p>
+            <a:pPr/>
+            <a:r>
+              <a:rPr sz="2000" b="0">
+                <a:solidFill>
+                  <a:srgbClr val="222222"/>
+                </a:solidFill>
+                <a:latin typeface="Calibri"/>
+              </a:rPr>
+              <a:t>An assembler translates it to machine code one to one.</a:t>
             </a:r>
           </a:p>
         </p:txBody>
@@ -4911,7 +7867,7 @@
                 </a:solidFill>
                 <a:latin typeface="Calibri"/>
               </a:rPr>
-              <a:t>Object-oriented concepts</a:t>
+              <a:t>The LMC instruction set</a:t>
             </a:r>
           </a:p>
         </p:txBody>
@@ -4940,49 +7896,73 @@
           <a:p>
             <a:pPr/>
             <a:r>
-              <a:rPr sz="2200" b="0">
-                <a:solidFill>
-                  <a:srgbClr val="222222"/>
-                </a:solidFill>
-                <a:latin typeface="Calibri"/>
-              </a:rPr>
-              <a:t>A class is a template defining attributes and methods; an object is a specific instance created by instantiation.</a:t>
+              <a:rPr sz="2000" b="0">
+                <a:solidFill>
+                  <a:srgbClr val="222222"/>
+                </a:solidFill>
+                <a:latin typeface="Calibri"/>
+              </a:rPr>
+              <a:t>INP reads input into the accumulator; OUT outputs the accumulator.</a:t>
             </a:r>
           </a:p>
           <a:p>
             <a:pPr/>
             <a:r>
-              <a:rPr sz="2200" b="0">
-                <a:solidFill>
-                  <a:srgbClr val="222222"/>
-                </a:solidFill>
-                <a:latin typeface="Calibri"/>
-              </a:rPr>
-              <a:t>An attribute is a variable (data/state) and a method is a subroutine (behaviour) of a class.</a:t>
+              <a:rPr sz="2000" b="0">
+                <a:solidFill>
+                  <a:srgbClr val="222222"/>
+                </a:solidFill>
+                <a:latin typeface="Calibri"/>
+              </a:rPr>
+              <a:t>LDA loads a mailbox into the accumulator; STA stores the accumulator into a mailbox.</a:t>
             </a:r>
           </a:p>
           <a:p>
             <a:pPr/>
             <a:r>
-              <a:rPr sz="2200" b="0">
-                <a:solidFill>
-                  <a:srgbClr val="222222"/>
-                </a:solidFill>
-                <a:latin typeface="Calibri"/>
-              </a:rPr>
-              <a:t>Encapsulation bundles data with its methods and hides the data (private attributes accessed via methods).</a:t>
+              <a:rPr sz="2000" b="0">
+                <a:solidFill>
+                  <a:srgbClr val="222222"/>
+                </a:solidFill>
+                <a:latin typeface="Calibri"/>
+              </a:rPr>
+              <a:t>ADD and SUB add or subtract a mailbox value to or from the accumulator.</a:t>
             </a:r>
           </a:p>
           <a:p>
             <a:pPr/>
             <a:r>
-              <a:rPr sz="2200" b="0">
-                <a:solidFill>
-                  <a:srgbClr val="222222"/>
-                </a:solidFill>
-                <a:latin typeface="Calibri"/>
-              </a:rPr>
-              <a:t>Inheritance lets a subclass acquire a superclass's members (DRY reuse); polymorphism lets the same method name behave differently per object.</a:t>
+              <a:rPr sz="2000" b="0">
+                <a:solidFill>
+                  <a:srgbClr val="222222"/>
+                </a:solidFill>
+                <a:latin typeface="Calibri"/>
+              </a:rPr>
+              <a:t>BRA always branches; BRZ branches if the accumulator is zero; BRP if zero or positive.</a:t>
+            </a:r>
+          </a:p>
+          <a:p>
+            <a:pPr/>
+            <a:r>
+              <a:rPr sz="2000" b="0">
+                <a:solidFill>
+                  <a:srgbClr val="222222"/>
+                </a:solidFill>
+                <a:latin typeface="Calibri"/>
+              </a:rPr>
+              <a:t>DAT reserves a mailbox for data; HLT stops the program.</a:t>
+            </a:r>
+          </a:p>
+          <a:p>
+            <a:pPr/>
+            <a:r>
+              <a:rPr sz="1800" b="1">
+                <a:solidFill>
+                  <a:srgbClr val="B76E00"/>
+                </a:solidFill>
+                <a:latin typeface="Calibri"/>
+              </a:rPr>
+              <a:t>BRZ and BRP test the accumulator, never a mailbox.</a:t>
             </a:r>
           </a:p>
         </p:txBody>
